--- a/docs/descargas/unity/Guia0_Preparar_Unity.pptx
+++ b/docs/descargas/unity/Guia0_Preparar_Unity.pptx
@@ -14,6 +14,8 @@
     <p:sldId id="262" r:id="rId14"/>
     <p:sldId id="263" r:id="rId15"/>
     <p:sldId id="264" r:id="rId16"/>
+    <p:sldId id="265" r:id="rId17"/>
+    <p:sldId id="266" r:id="rId18"/>
   </p:sldIdLst>
   <p:sldSz cx="12191695" cy="6858000" type="screen4x3"/>
   <p:notesSz cx="6858000" cy="9144000"/>
@@ -535,6 +537,146 @@
 </p:notes>
 </file>
 
+<file path=ppt/notesSlides/notesSlide10.xml><?xml version="1.0" encoding="utf-8"?>
+<p:notes xmlns:a="http://schemas.openxmlformats.org/drawingml/2006/main" xmlns:p="http://schemas.openxmlformats.org/presentationml/2006/main" xmlns:r="http://schemas.openxmlformats.org/officeDocument/2006/relationships">
+  <p:cSld>
+    <p:spTree>
+      <p:nvGrpSpPr>
+        <p:cNvPr id="1" name=""/>
+        <p:cNvGrpSpPr/>
+        <p:nvPr/>
+      </p:nvGrpSpPr>
+      <p:grpSpPr>
+        <a:xfrm>
+          <a:off x="0" y="0"/>
+          <a:ext cx="0" cy="0"/>
+          <a:chOff x="0" y="0"/>
+          <a:chExt cx="0" cy="0"/>
+        </a:xfrm>
+      </p:grpSpPr>
+      <p:sp>
+        <p:nvSpPr>
+          <p:cNvPr id="2" name="Slide Image Placeholder 1"/>
+          <p:cNvSpPr>
+            <a:spLocks noGrp="1"/>
+          </p:cNvSpPr>
+          <p:nvPr>
+            <p:ph type="sldImg" idx="2"/>
+          </p:nvPr>
+        </p:nvSpPr>
+        <p:spPr/>
+      </p:sp>
+      <p:sp>
+        <p:nvSpPr>
+          <p:cNvPr id="3" name="Notes Placeholder 2"/>
+          <p:cNvSpPr>
+            <a:spLocks noGrp="1"/>
+          </p:cNvSpPr>
+          <p:nvPr>
+            <p:ph type="body" idx="3" sz="quarter"/>
+          </p:nvPr>
+        </p:nvSpPr>
+        <p:spPr/>
+        <p:txBody>
+          <a:bodyPr/>
+          <a:lstStyle/>
+          <a:p>
+            <a:r>
+              <a:t>GUION. Tarde o temprano la consola se pone roja, y no es grave si saben leerla. El mensaje tiene cuatro partes: el archivo, la línea, la columna y qué no entendió. Este es real, de agosto: la línea 23 quedó a medias. Doble clic en el error y Visual Studio abre justo ahí. Miren esa línea y la de arriba: casi siempre falta un punto y coma o una llave. Guardan con Control S, vuelven a Unity y la consola se actualiza sola.</a:t>
+            </a:r>
+          </a:p>
+        </p:txBody>
+      </p:sp>
+      <p:sp>
+        <p:nvSpPr>
+          <p:cNvPr id="4" name="Slide Number Placeholder 3"/>
+          <p:cNvSpPr>
+            <a:spLocks noGrp="1"/>
+          </p:cNvSpPr>
+          <p:nvPr>
+            <p:ph type="sldNum" idx="5" sz="quarter"/>
+          </p:nvPr>
+        </p:nvSpPr>
+        <p:spPr/>
+      </p:sp>
+    </p:spTree>
+  </p:cSld>
+  <p:clrMapOvr>
+    <a:masterClrMapping/>
+  </p:clrMapOvr>
+</p:notes>
+</file>
+
+<file path=ppt/notesSlides/notesSlide11.xml><?xml version="1.0" encoding="utf-8"?>
+<p:notes xmlns:a="http://schemas.openxmlformats.org/drawingml/2006/main" xmlns:p="http://schemas.openxmlformats.org/presentationml/2006/main" xmlns:r="http://schemas.openxmlformats.org/officeDocument/2006/relationships">
+  <p:cSld>
+    <p:spTree>
+      <p:nvGrpSpPr>
+        <p:cNvPr id="1" name=""/>
+        <p:cNvGrpSpPr/>
+        <p:nvPr/>
+      </p:nvGrpSpPr>
+      <p:grpSpPr>
+        <a:xfrm>
+          <a:off x="0" y="0"/>
+          <a:ext cx="0" cy="0"/>
+          <a:chOff x="0" y="0"/>
+          <a:chExt cx="0" cy="0"/>
+        </a:xfrm>
+      </p:grpSpPr>
+      <p:sp>
+        <p:nvSpPr>
+          <p:cNvPr id="2" name="Slide Image Placeholder 1"/>
+          <p:cNvSpPr>
+            <a:spLocks noGrp="1"/>
+          </p:cNvSpPr>
+          <p:nvPr>
+            <p:ph type="sldImg" idx="2"/>
+          </p:nvPr>
+        </p:nvSpPr>
+        <p:spPr/>
+      </p:sp>
+      <p:sp>
+        <p:nvSpPr>
+          <p:cNvPr id="3" name="Notes Placeholder 2"/>
+          <p:cNvSpPr>
+            <a:spLocks noGrp="1"/>
+          </p:cNvSpPr>
+          <p:nvPr>
+            <p:ph type="body" idx="3" sz="quarter"/>
+          </p:nvPr>
+        </p:nvSpPr>
+        <p:spPr/>
+        <p:txBody>
+          <a:bodyPr/>
+          <a:lstStyle/>
+          <a:p>
+            <a:r>
+              <a:t>GUION. Antes de irse revisen las cinco casillas. La última es la evidencia: una captura del letrero verde en la carpeta del equipo, con el nombre Fase0_listo. Con eso sé que el computador quedó listo y el 28 arrancamos directo con el juego.</a:t>
+            </a:r>
+          </a:p>
+        </p:txBody>
+      </p:sp>
+      <p:sp>
+        <p:nvSpPr>
+          <p:cNvPr id="4" name="Slide Number Placeholder 3"/>
+          <p:cNvSpPr>
+            <a:spLocks noGrp="1"/>
+          </p:cNvSpPr>
+          <p:nvPr>
+            <p:ph type="sldNum" idx="5" sz="quarter"/>
+          </p:nvPr>
+        </p:nvSpPr>
+        <p:spPr/>
+      </p:sp>
+    </p:spTree>
+  </p:cSld>
+  <p:clrMapOvr>
+    <a:masterClrMapping/>
+  </p:clrMapOvr>
+</p:notes>
+</file>
+
 <file path=ppt/notesSlides/notesSlide2.xml><?xml version="1.0" encoding="utf-8"?>
 <p:notes xmlns:a="http://schemas.openxmlformats.org/drawingml/2006/main" xmlns:p="http://schemas.openxmlformats.org/presentationml/2006/main" xmlns:r="http://schemas.openxmlformats.org/officeDocument/2006/relationships">
   <p:cSld>
@@ -930,7 +1072,7 @@
           <a:lstStyle/>
           <a:p>
             <a:r>
-              <a:t>GUION. El kit son las piezas que les preparé: scripts, imágenes y sonidos. Viene en un solo archivo terminado en unitypackage. Assets, Import Package, Custom Package, lo eligen y Import, sin desmarcar nada. Luego abren la escena de prueba y le dan Play. Si sale Kit listo en verde, todo está bien: la versión, el kit y que no haya errores. Ese verde es lo que les voy a pedir que me muestren antes de seguir.</a:t>
+              <a:t>GUION. El kit es un solo archivo, y está en Drive, en la carpeta de su equipo, dentro de la que dice H, 21 y 22 de octubre. Cada equipo tiene el suyo: motricidad para el 10.1 y ritmo para el 10.2. Descárguenlo y guárdenlo en una carpeta C Unity Kit, aparte de la carpeta del proyecto, para no mezclarlos. Una advertencia: no lo descompriman. Parece un zip pero no lo es; Unity lo abre directo. Y fíjense en las otras dos carpetas: la I y la J ya tienen las guías de las semanas que vienen.</a:t>
             </a:r>
           </a:p>
         </p:txBody>
@@ -1000,7 +1142,7 @@
           <a:lstStyle/>
           <a:p>
             <a:r>
-              <a:t>GUION. Tarde o temprano la consola se pone roja, y no es grave si saben leerla. El mensaje tiene cuatro partes: el archivo, la línea, la columna y qué no entendió. Este es real, de agosto: la línea 23 quedó a medias. Doble clic en el error y Visual Studio abre justo ahí. Miren esa línea y la de arriba: casi siempre falta un punto y coma o una llave. Guardan con Control S, vuelven a Unity y la consola se actualiza sola.</a:t>
+              <a:t>GUION. Con el proyecto abierto, Assets, Import Package, Custom Package. Se abre el explorador: elijan el archivo que guardaron en C Unity Kit. Aparece una ventana con la lista de todo lo que trae el kit, cada cosa con su casilla. Dejen todo marcado y pulsen Import. Abajo a la derecha de Unity gira un círculo mientras importa y compila los scripts: esperen a que pare. Cuando termine, en la ventana Project, dentro de Assets, aparece la carpeta KitEquipo10. Si ya habían importado un kit anterior, importen este encima sin desmarcar nada.</a:t>
             </a:r>
           </a:p>
         </p:txBody>
@@ -1070,7 +1212,7 @@
           <a:lstStyle/>
           <a:p>
             <a:r>
-              <a:t>GUION. Antes de irse revisen las cinco casillas. La última es la evidencia: una captura del letrero verde en la carpeta del equipo, con el nombre Fase0_listo. Con eso sé que el computador quedó listo y el 28 arrancamos directo con el juego.</a:t>
+              <a:t>GUION. Para comprobar que todo quedó bien: en Project abren KitEquipo10, Escenas, y hacen doble clic en 00_PruebaDelKit. Le dan Play. Si en la ventana Game sale Kit listo en verde, todo está bien: la versión, el kit y que no haya errores. Ese verde es lo que les voy a pedir que me muestren antes de seguir. Si sale en naranja, es otra versión de Unity.</a:t>
             </a:r>
           </a:p>
         </p:txBody>
@@ -4741,7 +4883,1348 @@
                 </a:solidFill>
                 <a:latin typeface="Calibri"/>
               </a:rPr>
-              <a:t>Guía 0 · Preparar Unity  ·  1 de 9</a:t>
+              <a:t>Guía 0 · Preparar Unity  ·  1 de 11</a:t>
+            </a:r>
+          </a:p>
+        </p:txBody>
+      </p:sp>
+    </p:spTree>
+  </p:cSld>
+  <p:clrMapOvr>
+    <a:masterClrMapping/>
+  </p:clrMapOvr>
+</p:sld>
+</file>
+
+<file path=ppt/slides/slide10.xml><?xml version="1.0" encoding="utf-8"?>
+<p:sld xmlns:a="http://schemas.openxmlformats.org/drawingml/2006/main" xmlns:p="http://schemas.openxmlformats.org/presentationml/2006/main" xmlns:r="http://schemas.openxmlformats.org/officeDocument/2006/relationships">
+  <p:cSld>
+    <p:bg>
+      <p:bgPr>
+        <a:solidFill>
+          <a:srgbClr val="EFF3FA"/>
+        </a:solidFill>
+        <a:effectLst/>
+      </p:bgPr>
+    </p:bg>
+    <p:spTree>
+      <p:nvGrpSpPr>
+        <p:cNvPr id="1" name=""/>
+        <p:cNvGrpSpPr/>
+        <p:nvPr/>
+      </p:nvGrpSpPr>
+      <p:grpSpPr/>
+      <p:sp>
+        <p:nvSpPr>
+          <p:cNvPr id="2" name="Etiqueta de sección"/>
+          <p:cNvSpPr txBox="1"/>
+          <p:nvPr/>
+        </p:nvSpPr>
+        <p:spPr>
+          <a:xfrm>
+            <a:off x="548640" y="320040"/>
+            <a:ext cx="2743200" cy="274320"/>
+          </a:xfrm>
+          <a:prstGeom prst="rect">
+            <a:avLst/>
+          </a:prstGeom>
+          <a:noFill/>
+        </p:spPr>
+        <p:txBody>
+          <a:bodyPr wrap="square" lIns="0" rIns="0" tIns="0" bIns="0" anchor="t">
+            <a:spAutoFit/>
+          </a:bodyPr>
+          <a:lstStyle/>
+          <a:p>
+            <a:pPr algn="l">
+              <a:spcAft>
+                <a:spcPts val="600"/>
+              </a:spcAft>
+            </a:pPr>
+            <a:r>
+              <a:rPr sz="1200" b="1" i="0">
+                <a:solidFill>
+                  <a:srgbClr val="7317C9"/>
+                </a:solidFill>
+                <a:latin typeface="Calibri"/>
+              </a:rPr>
+              <a:t>Unity</a:t>
+            </a:r>
+          </a:p>
+        </p:txBody>
+      </p:sp>
+      <p:sp>
+        <p:nvSpPr>
+          <p:cNvPr id="3" name="Título"/>
+          <p:cNvSpPr txBox="1"/>
+          <p:nvPr/>
+        </p:nvSpPr>
+        <p:spPr>
+          <a:xfrm>
+            <a:off x="548640" y="658368"/>
+            <a:ext cx="11064240" cy="731520"/>
+          </a:xfrm>
+          <a:prstGeom prst="rect">
+            <a:avLst/>
+          </a:prstGeom>
+          <a:noFill/>
+        </p:spPr>
+        <p:txBody>
+          <a:bodyPr wrap="square" lIns="0" rIns="0" tIns="0" bIns="0" anchor="t">
+            <a:spAutoFit/>
+          </a:bodyPr>
+          <a:lstStyle/>
+          <a:p>
+            <a:pPr algn="l">
+              <a:spcAft>
+                <a:spcPts val="600"/>
+              </a:spcAft>
+            </a:pPr>
+            <a:r>
+              <a:rPr sz="3200" b="1" i="0">
+                <a:solidFill>
+                  <a:srgbClr val="0A0E1A"/>
+                </a:solidFill>
+                <a:latin typeface="Cambria"/>
+              </a:rPr>
+              <a:t>Si la consola se pone roja, léela así</a:t>
+            </a:r>
+          </a:p>
+        </p:txBody>
+      </p:sp>
+      <p:sp>
+        <p:nvSpPr>
+          <p:cNvPr id="4" name="Rounded Rectangle 3"/>
+          <p:cNvSpPr/>
+          <p:nvPr/>
+        </p:nvSpPr>
+        <p:spPr>
+          <a:xfrm>
+            <a:off x="548640" y="1645920"/>
+            <a:ext cx="11109960" cy="640080"/>
+          </a:xfrm>
+          <a:prstGeom prst="roundRect">
+            <a:avLst>
+              <a:gd name="adj" fmla="val 5000"/>
+            </a:avLst>
+          </a:prstGeom>
+          <a:solidFill>
+            <a:srgbClr val="0F1424"/>
+          </a:solidFill>
+          <a:ln>
+            <a:noFill/>
+          </a:ln>
+          <a:effectLst/>
+        </p:spPr>
+        <p:style>
+          <a:lnRef idx="1">
+            <a:schemeClr val="accent1"/>
+          </a:lnRef>
+          <a:fillRef idx="3">
+            <a:schemeClr val="accent1"/>
+          </a:fillRef>
+          <a:effectRef idx="2">
+            <a:schemeClr val="accent1"/>
+          </a:effectRef>
+          <a:fontRef idx="minor">
+            <a:schemeClr val="lt1"/>
+          </a:fontRef>
+        </p:style>
+        <p:txBody>
+          <a:bodyPr rtlCol="0" anchor="ctr"/>
+          <a:lstStyle/>
+          <a:p/>
+        </p:txBody>
+      </p:sp>
+      <p:sp>
+        <p:nvSpPr>
+          <p:cNvPr id="5" name="TextBox 4"/>
+          <p:cNvSpPr txBox="1"/>
+          <p:nvPr/>
+        </p:nvSpPr>
+        <p:spPr>
+          <a:xfrm>
+            <a:off x="777240" y="1828800"/>
+            <a:ext cx="10652760" cy="365759"/>
+          </a:xfrm>
+          <a:prstGeom prst="rect">
+            <a:avLst/>
+          </a:prstGeom>
+          <a:noFill/>
+        </p:spPr>
+        <p:txBody>
+          <a:bodyPr wrap="square" lIns="0" rIns="0" tIns="0" bIns="0" anchor="t">
+            <a:spAutoFit/>
+          </a:bodyPr>
+          <a:lstStyle/>
+          <a:p>
+            <a:pPr algn="l">
+              <a:spcAft>
+                <a:spcPts val="200"/>
+              </a:spcAft>
+            </a:pPr>
+            <a:r>
+              <a:rPr sz="1600" b="0" i="0">
+                <a:solidFill>
+                  <a:srgbClr val="E9EEFB"/>
+                </a:solidFill>
+                <a:latin typeface="Consolas"/>
+              </a:rPr>
+              <a:t>Assets\Scripts\PlayerMovement.cs(23,26): error CS1525: Invalid expression term '}'</a:t>
+            </a:r>
+          </a:p>
+        </p:txBody>
+      </p:sp>
+      <p:sp>
+        <p:nvSpPr>
+          <p:cNvPr id="6" name="TextBox 5"/>
+          <p:cNvSpPr txBox="1"/>
+          <p:nvPr/>
+        </p:nvSpPr>
+        <p:spPr>
+          <a:xfrm>
+            <a:off x="777240" y="2377440"/>
+            <a:ext cx="2743200" cy="320040"/>
+          </a:xfrm>
+          <a:prstGeom prst="rect">
+            <a:avLst/>
+          </a:prstGeom>
+          <a:noFill/>
+        </p:spPr>
+        <p:txBody>
+          <a:bodyPr wrap="square" lIns="0" rIns="0" tIns="0" bIns="0" anchor="t">
+            <a:spAutoFit/>
+          </a:bodyPr>
+          <a:lstStyle/>
+          <a:p>
+            <a:pPr algn="l">
+              <a:spcAft>
+                <a:spcPts val="600"/>
+              </a:spcAft>
+            </a:pPr>
+            <a:r>
+              <a:rPr sz="1300" b="1" i="0">
+                <a:solidFill>
+                  <a:srgbClr val="7317C9"/>
+                </a:solidFill>
+                <a:latin typeface="Calibri"/>
+              </a:rPr>
+              <a:t>▲ qué archivo</a:t>
+            </a:r>
+          </a:p>
+        </p:txBody>
+      </p:sp>
+      <p:sp>
+        <p:nvSpPr>
+          <p:cNvPr id="7" name="TextBox 6"/>
+          <p:cNvSpPr txBox="1"/>
+          <p:nvPr/>
+        </p:nvSpPr>
+        <p:spPr>
+          <a:xfrm>
+            <a:off x="4709160" y="2377440"/>
+            <a:ext cx="2194560" cy="320040"/>
+          </a:xfrm>
+          <a:prstGeom prst="rect">
+            <a:avLst/>
+          </a:prstGeom>
+          <a:noFill/>
+        </p:spPr>
+        <p:txBody>
+          <a:bodyPr wrap="square" lIns="0" rIns="0" tIns="0" bIns="0" anchor="t">
+            <a:spAutoFit/>
+          </a:bodyPr>
+          <a:lstStyle/>
+          <a:p>
+            <a:pPr algn="l">
+              <a:spcAft>
+                <a:spcPts val="600"/>
+              </a:spcAft>
+            </a:pPr>
+            <a:r>
+              <a:rPr sz="1300" b="1" i="0">
+                <a:solidFill>
+                  <a:srgbClr val="7317C9"/>
+                </a:solidFill>
+                <a:latin typeface="Calibri"/>
+              </a:rPr>
+              <a:t>▲ línea 23, columna 26</a:t>
+            </a:r>
+          </a:p>
+        </p:txBody>
+      </p:sp>
+      <p:sp>
+        <p:nvSpPr>
+          <p:cNvPr id="8" name="TextBox 7"/>
+          <p:cNvSpPr txBox="1"/>
+          <p:nvPr/>
+        </p:nvSpPr>
+        <p:spPr>
+          <a:xfrm>
+            <a:off x="6903720" y="2377440"/>
+            <a:ext cx="3200400" cy="320040"/>
+          </a:xfrm>
+          <a:prstGeom prst="rect">
+            <a:avLst/>
+          </a:prstGeom>
+          <a:noFill/>
+        </p:spPr>
+        <p:txBody>
+          <a:bodyPr wrap="square" lIns="0" rIns="0" tIns="0" bIns="0" anchor="t">
+            <a:spAutoFit/>
+          </a:bodyPr>
+          <a:lstStyle/>
+          <a:p>
+            <a:pPr algn="l">
+              <a:spcAft>
+                <a:spcPts val="600"/>
+              </a:spcAft>
+            </a:pPr>
+            <a:r>
+              <a:rPr sz="1300" b="1" i="0">
+                <a:solidFill>
+                  <a:srgbClr val="7317C9"/>
+                </a:solidFill>
+                <a:latin typeface="Calibri"/>
+              </a:rPr>
+              <a:t>▲ qué no entendió Unity</a:t>
+            </a:r>
+          </a:p>
+        </p:txBody>
+      </p:sp>
+      <p:sp>
+        <p:nvSpPr>
+          <p:cNvPr id="9" name="Rounded Rectangle 8"/>
+          <p:cNvSpPr/>
+          <p:nvPr/>
+        </p:nvSpPr>
+        <p:spPr>
+          <a:xfrm>
+            <a:off x="548640" y="2880360"/>
+            <a:ext cx="5760720" cy="1828800"/>
+          </a:xfrm>
+          <a:prstGeom prst="roundRect">
+            <a:avLst>
+              <a:gd name="adj" fmla="val 5000"/>
+            </a:avLst>
+          </a:prstGeom>
+          <a:solidFill>
+            <a:srgbClr val="0F1424"/>
+          </a:solidFill>
+          <a:ln>
+            <a:noFill/>
+          </a:ln>
+          <a:effectLst/>
+        </p:spPr>
+        <p:style>
+          <a:lnRef idx="1">
+            <a:schemeClr val="accent1"/>
+          </a:lnRef>
+          <a:fillRef idx="3">
+            <a:schemeClr val="accent1"/>
+          </a:fillRef>
+          <a:effectRef idx="2">
+            <a:schemeClr val="accent1"/>
+          </a:effectRef>
+          <a:fontRef idx="minor">
+            <a:schemeClr val="lt1"/>
+          </a:fontRef>
+        </p:style>
+        <p:txBody>
+          <a:bodyPr rtlCol="0" anchor="ctr"/>
+          <a:lstStyle/>
+          <a:p/>
+        </p:txBody>
+      </p:sp>
+      <p:sp>
+        <p:nvSpPr>
+          <p:cNvPr id="10" name="TextBox 9"/>
+          <p:cNvSpPr txBox="1"/>
+          <p:nvPr/>
+        </p:nvSpPr>
+        <p:spPr>
+          <a:xfrm>
+            <a:off x="777240" y="3063240"/>
+            <a:ext cx="5303520" cy="1554480"/>
+          </a:xfrm>
+          <a:prstGeom prst="rect">
+            <a:avLst/>
+          </a:prstGeom>
+          <a:noFill/>
+        </p:spPr>
+        <p:txBody>
+          <a:bodyPr wrap="square" lIns="0" rIns="0" tIns="0" bIns="0" anchor="t">
+            <a:spAutoFit/>
+          </a:bodyPr>
+          <a:lstStyle/>
+          <a:p>
+            <a:pPr algn="l">
+              <a:spcAft>
+                <a:spcPts val="200"/>
+              </a:spcAft>
+            </a:pPr>
+            <a:r>
+              <a:rPr sz="1500" b="0" i="0">
+                <a:solidFill>
+                  <a:srgbClr val="E9EEFB"/>
+                </a:solidFill>
+                <a:latin typeface="Consolas"/>
+              </a:rPr>
+              <a:t>21    transform.Translate(...);</a:t>
+            </a:r>
+          </a:p>
+          <a:p>
+            <a:pPr algn="l">
+              <a:spcAft>
+                <a:spcPts val="200"/>
+              </a:spcAft>
+            </a:pPr>
+            <a:r>
+              <a:rPr sz="1500" b="0" i="0">
+                <a:solidFill>
+                  <a:srgbClr val="E9EEFB"/>
+                </a:solidFill>
+                <a:latin typeface="Consolas"/>
+              </a:rPr>
+              <a:t>22</a:t>
+            </a:r>
+          </a:p>
+          <a:p>
+            <a:pPr algn="l">
+              <a:spcAft>
+                <a:spcPts val="200"/>
+              </a:spcAft>
+            </a:pPr>
+            <a:r>
+              <a:rPr sz="1500" b="0" i="0">
+                <a:solidFill>
+                  <a:srgbClr val="FFC94D"/>
+                </a:solidFill>
+                <a:latin typeface="Consolas"/>
+              </a:rPr>
+              <a:t>23    float rotationY =</a:t>
+            </a:r>
+          </a:p>
+          <a:p>
+            <a:pPr algn="l">
+              <a:spcAft>
+                <a:spcPts val="200"/>
+              </a:spcAft>
+            </a:pPr>
+            <a:r>
+              <a:rPr sz="1500" b="0" i="0">
+                <a:solidFill>
+                  <a:srgbClr val="E9EEFB"/>
+                </a:solidFill>
+                <a:latin typeface="Consolas"/>
+              </a:rPr>
+              <a:t>24  }</a:t>
+            </a:r>
+          </a:p>
+        </p:txBody>
+      </p:sp>
+      <p:sp>
+        <p:nvSpPr>
+          <p:cNvPr id="11" name="TextBox 10"/>
+          <p:cNvSpPr txBox="1"/>
+          <p:nvPr/>
+        </p:nvSpPr>
+        <p:spPr>
+          <a:xfrm>
+            <a:off x="548640" y="4846320"/>
+            <a:ext cx="5760720" cy="1371600"/>
+          </a:xfrm>
+          <a:prstGeom prst="rect">
+            <a:avLst/>
+          </a:prstGeom>
+          <a:noFill/>
+        </p:spPr>
+        <p:txBody>
+          <a:bodyPr wrap="square" lIns="0" rIns="0" tIns="0" bIns="0" anchor="t">
+            <a:spAutoFit/>
+          </a:bodyPr>
+          <a:lstStyle/>
+          <a:p>
+            <a:pPr algn="l">
+              <a:spcAft>
+                <a:spcPts val="600"/>
+              </a:spcAft>
+            </a:pPr>
+            <a:r>
+              <a:rPr sz="1500" b="1" i="0">
+                <a:solidFill>
+                  <a:srgbClr val="0A0E1A"/>
+                </a:solidFill>
+                <a:latin typeface="Calibri"/>
+              </a:rPr>
+              <a:t>Caso real de agosto: </a:t>
+            </a:r>
+            <a:r>
+              <a:rPr sz="1500" b="0" i="0">
+                <a:solidFill>
+                  <a:srgbClr val="0A0E1A"/>
+                </a:solidFill>
+                <a:latin typeface="Calibri"/>
+              </a:rPr>
+              <a:t>la línea 23 quedó a medias. Le falta el valor y el punto y coma.</a:t>
+            </a:r>
+          </a:p>
+          <a:p>
+            <a:pPr algn="l">
+              <a:spcAft>
+                <a:spcPts val="600"/>
+              </a:spcAft>
+            </a:pPr>
+            <a:r>
+              <a:rPr sz="1500" b="0" i="0">
+                <a:solidFill>
+                  <a:srgbClr val="0A0E1A"/>
+                </a:solidFill>
+                <a:latin typeface="Calibri"/>
+              </a:rPr>
+              <a:t>Un error en un solo archivo apaga todos los demás.</a:t>
+            </a:r>
+          </a:p>
+        </p:txBody>
+      </p:sp>
+      <p:sp>
+        <p:nvSpPr>
+          <p:cNvPr id="12" name="Rounded Rectangle 11"/>
+          <p:cNvSpPr/>
+          <p:nvPr/>
+        </p:nvSpPr>
+        <p:spPr>
+          <a:xfrm>
+            <a:off x="6675120" y="2880360"/>
+            <a:ext cx="4983480" cy="3383280"/>
+          </a:xfrm>
+          <a:prstGeom prst="roundRect">
+            <a:avLst>
+              <a:gd name="adj" fmla="val 6000"/>
+            </a:avLst>
+          </a:prstGeom>
+          <a:solidFill>
+            <a:srgbClr val="FFFFFF"/>
+          </a:solidFill>
+          <a:ln w="12700">
+            <a:solidFill>
+              <a:srgbClr val="D2DAE9"/>
+            </a:solidFill>
+          </a:ln>
+          <a:effectLst/>
+        </p:spPr>
+        <p:style>
+          <a:lnRef idx="1">
+            <a:schemeClr val="accent1"/>
+          </a:lnRef>
+          <a:fillRef idx="3">
+            <a:schemeClr val="accent1"/>
+          </a:fillRef>
+          <a:effectRef idx="2">
+            <a:schemeClr val="accent1"/>
+          </a:effectRef>
+          <a:fontRef idx="minor">
+            <a:schemeClr val="lt1"/>
+          </a:fontRef>
+        </p:style>
+        <p:txBody>
+          <a:bodyPr rtlCol="0" anchor="ctr"/>
+          <a:lstStyle/>
+          <a:p/>
+        </p:txBody>
+      </p:sp>
+      <p:sp>
+        <p:nvSpPr>
+          <p:cNvPr id="13" name="TextBox 12"/>
+          <p:cNvSpPr txBox="1"/>
+          <p:nvPr/>
+        </p:nvSpPr>
+        <p:spPr>
+          <a:xfrm>
+            <a:off x="6949440" y="3035808"/>
+            <a:ext cx="4572000" cy="365760"/>
+          </a:xfrm>
+          <a:prstGeom prst="rect">
+            <a:avLst/>
+          </a:prstGeom>
+          <a:noFill/>
+        </p:spPr>
+        <p:txBody>
+          <a:bodyPr wrap="square" lIns="0" rIns="0" tIns="0" bIns="0" anchor="t">
+            <a:spAutoFit/>
+          </a:bodyPr>
+          <a:lstStyle/>
+          <a:p>
+            <a:pPr algn="l">
+              <a:spcAft>
+                <a:spcPts val="600"/>
+              </a:spcAft>
+            </a:pPr>
+            <a:r>
+              <a:rPr sz="1700" b="1" i="0">
+                <a:solidFill>
+                  <a:srgbClr val="0A0E1A"/>
+                </a:solidFill>
+                <a:latin typeface="Calibri"/>
+              </a:rPr>
+              <a:t>Los cuatro más comunes</a:t>
+            </a:r>
+          </a:p>
+        </p:txBody>
+      </p:sp>
+      <p:sp>
+        <p:nvSpPr>
+          <p:cNvPr id="14" name="TextBox 13"/>
+          <p:cNvSpPr txBox="1"/>
+          <p:nvPr/>
+        </p:nvSpPr>
+        <p:spPr>
+          <a:xfrm>
+            <a:off x="6949440" y="3520440"/>
+            <a:ext cx="4526280" cy="658368"/>
+          </a:xfrm>
+          <a:prstGeom prst="rect">
+            <a:avLst/>
+          </a:prstGeom>
+          <a:noFill/>
+        </p:spPr>
+        <p:txBody>
+          <a:bodyPr wrap="square" lIns="0" rIns="0" tIns="0" bIns="0" anchor="t">
+            <a:spAutoFit/>
+          </a:bodyPr>
+          <a:lstStyle/>
+          <a:p>
+            <a:pPr algn="l">
+              <a:spcAft>
+                <a:spcPts val="100"/>
+              </a:spcAft>
+            </a:pPr>
+            <a:r>
+              <a:rPr sz="1300" b="1" i="0">
+                <a:solidFill>
+                  <a:srgbClr val="0A0E1A"/>
+                </a:solidFill>
+                <a:latin typeface="Consolas"/>
+              </a:rPr>
+              <a:t>; expected</a:t>
+            </a:r>
+          </a:p>
+          <a:p>
+            <a:pPr algn="l">
+              <a:spcAft>
+                <a:spcPts val="100"/>
+              </a:spcAft>
+            </a:pPr>
+            <a:r>
+              <a:rPr sz="1300" b="0" i="0">
+                <a:solidFill>
+                  <a:srgbClr val="4F5C75"/>
+                </a:solidFill>
+                <a:latin typeface="Calibri"/>
+              </a:rPr>
+              <a:t>falta un punto y coma al final de la línea.</a:t>
+            </a:r>
+          </a:p>
+        </p:txBody>
+      </p:sp>
+      <p:sp>
+        <p:nvSpPr>
+          <p:cNvPr id="15" name="TextBox 14"/>
+          <p:cNvSpPr txBox="1"/>
+          <p:nvPr/>
+        </p:nvSpPr>
+        <p:spPr>
+          <a:xfrm>
+            <a:off x="6949440" y="4197096"/>
+            <a:ext cx="4526280" cy="658368"/>
+          </a:xfrm>
+          <a:prstGeom prst="rect">
+            <a:avLst/>
+          </a:prstGeom>
+          <a:noFill/>
+        </p:spPr>
+        <p:txBody>
+          <a:bodyPr wrap="square" lIns="0" rIns="0" tIns="0" bIns="0" anchor="t">
+            <a:spAutoFit/>
+          </a:bodyPr>
+          <a:lstStyle/>
+          <a:p>
+            <a:pPr algn="l">
+              <a:spcAft>
+                <a:spcPts val="100"/>
+              </a:spcAft>
+            </a:pPr>
+            <a:r>
+              <a:rPr sz="1300" b="1" i="0">
+                <a:solidFill>
+                  <a:srgbClr val="0A0E1A"/>
+                </a:solidFill>
+                <a:latin typeface="Consolas"/>
+              </a:rPr>
+              <a:t>The name '...' does not exist</a:t>
+            </a:r>
+          </a:p>
+          <a:p>
+            <a:pPr algn="l">
+              <a:spcAft>
+                <a:spcPts val="100"/>
+              </a:spcAft>
+            </a:pPr>
+            <a:r>
+              <a:rPr sz="1300" b="0" i="0">
+                <a:solidFill>
+                  <a:srgbClr val="4F5C75"/>
+                </a:solidFill>
+                <a:latin typeface="Calibri"/>
+              </a:rPr>
+              <a:t>un nombre mal escrito. C# distingue Mayúsculas.</a:t>
+            </a:r>
+          </a:p>
+        </p:txBody>
+      </p:sp>
+      <p:sp>
+        <p:nvSpPr>
+          <p:cNvPr id="16" name="TextBox 15"/>
+          <p:cNvSpPr txBox="1"/>
+          <p:nvPr/>
+        </p:nvSpPr>
+        <p:spPr>
+          <a:xfrm>
+            <a:off x="6949440" y="4873752"/>
+            <a:ext cx="4526280" cy="658368"/>
+          </a:xfrm>
+          <a:prstGeom prst="rect">
+            <a:avLst/>
+          </a:prstGeom>
+          <a:noFill/>
+        </p:spPr>
+        <p:txBody>
+          <a:bodyPr wrap="square" lIns="0" rIns="0" tIns="0" bIns="0" anchor="t">
+            <a:spAutoFit/>
+          </a:bodyPr>
+          <a:lstStyle/>
+          <a:p>
+            <a:pPr algn="l">
+              <a:spcAft>
+                <a:spcPts val="100"/>
+              </a:spcAft>
+            </a:pPr>
+            <a:r>
+              <a:rPr sz="1300" b="1" i="0">
+                <a:solidFill>
+                  <a:srgbClr val="0A0E1A"/>
+                </a:solidFill>
+                <a:latin typeface="Consolas"/>
+              </a:rPr>
+              <a:t>The type 'Text' could not be found</a:t>
+            </a:r>
+          </a:p>
+          <a:p>
+            <a:pPr algn="l">
+              <a:spcAft>
+                <a:spcPts val="100"/>
+              </a:spcAft>
+            </a:pPr>
+            <a:r>
+              <a:rPr sz="1300" b="0" i="0">
+                <a:solidFill>
+                  <a:srgbClr val="4F5C75"/>
+                </a:solidFill>
+                <a:latin typeface="Calibri"/>
+              </a:rPr>
+              <a:t>falta using UnityEngine.UI; arriba.</a:t>
+            </a:r>
+          </a:p>
+        </p:txBody>
+      </p:sp>
+      <p:sp>
+        <p:nvSpPr>
+          <p:cNvPr id="17" name="TextBox 16"/>
+          <p:cNvSpPr txBox="1"/>
+          <p:nvPr/>
+        </p:nvSpPr>
+        <p:spPr>
+          <a:xfrm>
+            <a:off x="6949440" y="5550408"/>
+            <a:ext cx="4526280" cy="658368"/>
+          </a:xfrm>
+          <a:prstGeom prst="rect">
+            <a:avLst/>
+          </a:prstGeom>
+          <a:noFill/>
+        </p:spPr>
+        <p:txBody>
+          <a:bodyPr wrap="square" lIns="0" rIns="0" tIns="0" bIns="0" anchor="t">
+            <a:spAutoFit/>
+          </a:bodyPr>
+          <a:lstStyle/>
+          <a:p>
+            <a:pPr algn="l">
+              <a:spcAft>
+                <a:spcPts val="100"/>
+              </a:spcAft>
+            </a:pPr>
+            <a:r>
+              <a:rPr sz="1300" b="1" i="0">
+                <a:solidFill>
+                  <a:srgbClr val="0A0E1A"/>
+                </a:solidFill>
+                <a:latin typeface="Consolas"/>
+              </a:rPr>
+              <a:t>script class cannot be found</a:t>
+            </a:r>
+          </a:p>
+          <a:p>
+            <a:pPr algn="l">
+              <a:spcAft>
+                <a:spcPts val="100"/>
+              </a:spcAft>
+            </a:pPr>
+            <a:r>
+              <a:rPr sz="1300" b="0" i="0">
+                <a:solidFill>
+                  <a:srgbClr val="4F5C75"/>
+                </a:solidFill>
+                <a:latin typeface="Calibri"/>
+              </a:rPr>
+              <a:t>el archivo y la clase no se llaman igual.</a:t>
+            </a:r>
+          </a:p>
+        </p:txBody>
+      </p:sp>
+      <p:sp>
+        <p:nvSpPr>
+          <p:cNvPr id="18" name="Pie"/>
+          <p:cNvSpPr txBox="1"/>
+          <p:nvPr/>
+        </p:nvSpPr>
+        <p:spPr>
+          <a:xfrm>
+            <a:off x="548640" y="6400800"/>
+            <a:ext cx="11064240" cy="274320"/>
+          </a:xfrm>
+          <a:prstGeom prst="rect">
+            <a:avLst/>
+          </a:prstGeom>
+          <a:noFill/>
+        </p:spPr>
+        <p:txBody>
+          <a:bodyPr wrap="square" lIns="0" rIns="0" tIns="0" bIns="0" anchor="t">
+            <a:spAutoFit/>
+          </a:bodyPr>
+          <a:lstStyle/>
+          <a:p>
+            <a:pPr algn="r">
+              <a:spcAft>
+                <a:spcPts val="600"/>
+              </a:spcAft>
+            </a:pPr>
+            <a:r>
+              <a:rPr sz="1100" b="0" i="0">
+                <a:solidFill>
+                  <a:srgbClr val="4F5C75"/>
+                </a:solidFill>
+                <a:latin typeface="Calibri"/>
+              </a:rPr>
+              <a:t>Guía 0 · Preparar Unity  ·  10 de 11</a:t>
+            </a:r>
+          </a:p>
+        </p:txBody>
+      </p:sp>
+    </p:spTree>
+  </p:cSld>
+  <p:clrMapOvr>
+    <a:masterClrMapping/>
+  </p:clrMapOvr>
+</p:sld>
+</file>
+
+<file path=ppt/slides/slide11.xml><?xml version="1.0" encoding="utf-8"?>
+<p:sld xmlns:a="http://schemas.openxmlformats.org/drawingml/2006/main" xmlns:p="http://schemas.openxmlformats.org/presentationml/2006/main" xmlns:r="http://schemas.openxmlformats.org/officeDocument/2006/relationships">
+  <p:cSld>
+    <p:bg>
+      <p:bgPr>
+        <a:solidFill>
+          <a:srgbClr val="070B18"/>
+        </a:solidFill>
+        <a:effectLst/>
+      </p:bgPr>
+    </p:bg>
+    <p:spTree>
+      <p:nvGrpSpPr>
+        <p:cNvPr id="1" name=""/>
+        <p:cNvGrpSpPr/>
+        <p:nvPr/>
+      </p:nvGrpSpPr>
+      <p:grpSpPr/>
+      <p:sp>
+        <p:nvSpPr>
+          <p:cNvPr id="2" name="Etiqueta de sección"/>
+          <p:cNvSpPr txBox="1"/>
+          <p:nvPr/>
+        </p:nvSpPr>
+        <p:spPr>
+          <a:xfrm>
+            <a:off x="548640" y="320040"/>
+            <a:ext cx="2743200" cy="274320"/>
+          </a:xfrm>
+          <a:prstGeom prst="rect">
+            <a:avLst/>
+          </a:prstGeom>
+          <a:noFill/>
+        </p:spPr>
+        <p:txBody>
+          <a:bodyPr wrap="square" lIns="0" rIns="0" tIns="0" bIns="0" anchor="t">
+            <a:spAutoFit/>
+          </a:bodyPr>
+          <a:lstStyle/>
+          <a:p>
+            <a:pPr algn="l">
+              <a:spcAft>
+                <a:spcPts val="600"/>
+              </a:spcAft>
+            </a:pPr>
+            <a:r>
+              <a:rPr sz="1200" b="1" i="0">
+                <a:solidFill>
+                  <a:srgbClr val="C59BFF"/>
+                </a:solidFill>
+                <a:latin typeface="Calibri"/>
+              </a:rPr>
+              <a:t>Unity</a:t>
+            </a:r>
+          </a:p>
+        </p:txBody>
+      </p:sp>
+      <p:sp>
+        <p:nvSpPr>
+          <p:cNvPr id="3" name="Título"/>
+          <p:cNvSpPr txBox="1"/>
+          <p:nvPr/>
+        </p:nvSpPr>
+        <p:spPr>
+          <a:xfrm>
+            <a:off x="548640" y="658368"/>
+            <a:ext cx="11064240" cy="731520"/>
+          </a:xfrm>
+          <a:prstGeom prst="rect">
+            <a:avLst/>
+          </a:prstGeom>
+          <a:noFill/>
+        </p:spPr>
+        <p:txBody>
+          <a:bodyPr wrap="square" lIns="0" rIns="0" tIns="0" bIns="0" anchor="t">
+            <a:spAutoFit/>
+          </a:bodyPr>
+          <a:lstStyle/>
+          <a:p>
+            <a:pPr algn="l">
+              <a:spcAft>
+                <a:spcPts val="600"/>
+              </a:spcAft>
+            </a:pPr>
+            <a:r>
+              <a:rPr sz="3200" b="1" i="0">
+                <a:solidFill>
+                  <a:srgbClr val="E9EEFB"/>
+                </a:solidFill>
+                <a:latin typeface="Cambria"/>
+              </a:rPr>
+              <a:t>Antes de salir</a:t>
+            </a:r>
+          </a:p>
+        </p:txBody>
+      </p:sp>
+      <p:sp>
+        <p:nvSpPr>
+          <p:cNvPr id="4" name="TextBox 3"/>
+          <p:cNvSpPr txBox="1"/>
+          <p:nvPr/>
+        </p:nvSpPr>
+        <p:spPr>
+          <a:xfrm>
+            <a:off x="548640" y="1737360"/>
+            <a:ext cx="6949440" cy="548640"/>
+          </a:xfrm>
+          <a:prstGeom prst="rect">
+            <a:avLst/>
+          </a:prstGeom>
+          <a:noFill/>
+        </p:spPr>
+        <p:txBody>
+          <a:bodyPr wrap="square" lIns="0" rIns="0" tIns="0" bIns="0" anchor="t">
+            <a:spAutoFit/>
+          </a:bodyPr>
+          <a:lstStyle/>
+          <a:p>
+            <a:pPr algn="l">
+              <a:spcAft>
+                <a:spcPts val="600"/>
+              </a:spcAft>
+            </a:pPr>
+            <a:r>
+              <a:rPr sz="2000" b="0" i="0">
+                <a:solidFill>
+                  <a:srgbClr val="C59BFF"/>
+                </a:solidFill>
+                <a:latin typeface="Calibri"/>
+              </a:rPr>
+              <a:t>☐   </a:t>
+            </a:r>
+            <a:r>
+              <a:rPr sz="1700" b="0" i="0">
+                <a:solidFill>
+                  <a:srgbClr val="E9EEFB"/>
+                </a:solidFill>
+                <a:latin typeface="Calibri"/>
+              </a:rPr>
+              <a:t>Unity 2019.4.38f1 instalada, con Visual Studio y WebGL.</a:t>
+            </a:r>
+          </a:p>
+        </p:txBody>
+      </p:sp>
+      <p:sp>
+        <p:nvSpPr>
+          <p:cNvPr id="5" name="TextBox 4"/>
+          <p:cNvSpPr txBox="1"/>
+          <p:nvPr/>
+        </p:nvSpPr>
+        <p:spPr>
+          <a:xfrm>
+            <a:off x="548640" y="2395728"/>
+            <a:ext cx="6949440" cy="548640"/>
+          </a:xfrm>
+          <a:prstGeom prst="rect">
+            <a:avLst/>
+          </a:prstGeom>
+          <a:noFill/>
+        </p:spPr>
+        <p:txBody>
+          <a:bodyPr wrap="square" lIns="0" rIns="0" tIns="0" bIns="0" anchor="t">
+            <a:spAutoFit/>
+          </a:bodyPr>
+          <a:lstStyle/>
+          <a:p>
+            <a:pPr algn="l">
+              <a:spcAft>
+                <a:spcPts val="600"/>
+              </a:spcAft>
+            </a:pPr>
+            <a:r>
+              <a:rPr sz="2000" b="0" i="0">
+                <a:solidFill>
+                  <a:srgbClr val="C59BFF"/>
+                </a:solidFill>
+                <a:latin typeface="Calibri"/>
+              </a:rPr>
+              <a:t>☐   </a:t>
+            </a:r>
+            <a:r>
+              <a:rPr sz="1700" b="0" i="0">
+                <a:solidFill>
+                  <a:srgbClr val="E9EEFB"/>
+                </a:solidFill>
+                <a:latin typeface="Calibri"/>
+              </a:rPr>
+              <a:t>El proyecto está en C:\Unity, no en OneDrive ni en el Escritorio.</a:t>
+            </a:r>
+          </a:p>
+        </p:txBody>
+      </p:sp>
+      <p:sp>
+        <p:nvSpPr>
+          <p:cNvPr id="6" name="TextBox 5"/>
+          <p:cNvSpPr txBox="1"/>
+          <p:nvPr/>
+        </p:nvSpPr>
+        <p:spPr>
+          <a:xfrm>
+            <a:off x="548640" y="3054096"/>
+            <a:ext cx="6949440" cy="548640"/>
+          </a:xfrm>
+          <a:prstGeom prst="rect">
+            <a:avLst/>
+          </a:prstGeom>
+          <a:noFill/>
+        </p:spPr>
+        <p:txBody>
+          <a:bodyPr wrap="square" lIns="0" rIns="0" tIns="0" bIns="0" anchor="t">
+            <a:spAutoFit/>
+          </a:bodyPr>
+          <a:lstStyle/>
+          <a:p>
+            <a:pPr algn="l">
+              <a:spcAft>
+                <a:spcPts val="600"/>
+              </a:spcAft>
+            </a:pPr>
+            <a:r>
+              <a:rPr sz="2000" b="0" i="0">
+                <a:solidFill>
+                  <a:srgbClr val="C59BFF"/>
+                </a:solidFill>
+                <a:latin typeface="Calibri"/>
+              </a:rPr>
+              <a:t>☐   </a:t>
+            </a:r>
+            <a:r>
+              <a:rPr sz="1700" b="0" i="0">
+                <a:solidFill>
+                  <a:srgbClr val="E9EEFB"/>
+                </a:solidFill>
+                <a:latin typeface="Calibri"/>
+              </a:rPr>
+              <a:t>Doble clic en un script abre Visual Studio.</a:t>
+            </a:r>
+          </a:p>
+        </p:txBody>
+      </p:sp>
+      <p:sp>
+        <p:nvSpPr>
+          <p:cNvPr id="7" name="TextBox 6"/>
+          <p:cNvSpPr txBox="1"/>
+          <p:nvPr/>
+        </p:nvSpPr>
+        <p:spPr>
+          <a:xfrm>
+            <a:off x="548640" y="3712464"/>
+            <a:ext cx="6949440" cy="548640"/>
+          </a:xfrm>
+          <a:prstGeom prst="rect">
+            <a:avLst/>
+          </a:prstGeom>
+          <a:noFill/>
+        </p:spPr>
+        <p:txBody>
+          <a:bodyPr wrap="square" lIns="0" rIns="0" tIns="0" bIns="0" anchor="t">
+            <a:spAutoFit/>
+          </a:bodyPr>
+          <a:lstStyle/>
+          <a:p>
+            <a:pPr algn="l">
+              <a:spcAft>
+                <a:spcPts val="600"/>
+              </a:spcAft>
+            </a:pPr>
+            <a:r>
+              <a:rPr sz="2000" b="0" i="0">
+                <a:solidFill>
+                  <a:srgbClr val="C59BFF"/>
+                </a:solidFill>
+                <a:latin typeface="Calibri"/>
+              </a:rPr>
+              <a:t>☐   </a:t>
+            </a:r>
+            <a:r>
+              <a:rPr sz="1700" b="0" i="0">
+                <a:solidFill>
+                  <a:srgbClr val="E9EEFB"/>
+                </a:solidFill>
+                <a:latin typeface="Calibri"/>
+              </a:rPr>
+              <a:t>La escena 00_PruebaDelKit dice Kit listo en verde.</a:t>
+            </a:r>
+          </a:p>
+        </p:txBody>
+      </p:sp>
+      <p:sp>
+        <p:nvSpPr>
+          <p:cNvPr id="8" name="TextBox 7"/>
+          <p:cNvSpPr txBox="1"/>
+          <p:nvPr/>
+        </p:nvSpPr>
+        <p:spPr>
+          <a:xfrm>
+            <a:off x="548640" y="4370831"/>
+            <a:ext cx="6949440" cy="548640"/>
+          </a:xfrm>
+          <a:prstGeom prst="rect">
+            <a:avLst/>
+          </a:prstGeom>
+          <a:noFill/>
+        </p:spPr>
+        <p:txBody>
+          <a:bodyPr wrap="square" lIns="0" rIns="0" tIns="0" bIns="0" anchor="t">
+            <a:spAutoFit/>
+          </a:bodyPr>
+          <a:lstStyle/>
+          <a:p>
+            <a:pPr algn="l">
+              <a:spcAft>
+                <a:spcPts val="600"/>
+              </a:spcAft>
+            </a:pPr>
+            <a:r>
+              <a:rPr sz="2000" b="0" i="0">
+                <a:solidFill>
+                  <a:srgbClr val="C59BFF"/>
+                </a:solidFill>
+                <a:latin typeface="Calibri"/>
+              </a:rPr>
+              <a:t>☐   </a:t>
+            </a:r>
+            <a:r>
+              <a:rPr sz="1700" b="0" i="0">
+                <a:solidFill>
+                  <a:srgbClr val="E9EEFB"/>
+                </a:solidFill>
+                <a:latin typeface="Calibri"/>
+              </a:rPr>
+              <a:t>Captura de esa pantalla subida a la carpeta del equipo: Fase0_listo.png</a:t>
+            </a:r>
+          </a:p>
+        </p:txBody>
+      </p:sp>
+      <p:sp>
+        <p:nvSpPr>
+          <p:cNvPr id="9" name="Rounded Rectangle 8"/>
+          <p:cNvSpPr/>
+          <p:nvPr/>
+        </p:nvSpPr>
+        <p:spPr>
+          <a:xfrm>
+            <a:off x="8001000" y="1737360"/>
+            <a:ext cx="3657600" cy="2331720"/>
+          </a:xfrm>
+          <a:prstGeom prst="roundRect">
+            <a:avLst>
+              <a:gd name="adj" fmla="val 5000"/>
+            </a:avLst>
+          </a:prstGeom>
+          <a:solidFill>
+            <a:srgbClr val="141D3D"/>
+          </a:solidFill>
+          <a:ln>
+            <a:noFill/>
+          </a:ln>
+          <a:effectLst/>
+        </p:spPr>
+        <p:style>
+          <a:lnRef idx="1">
+            <a:schemeClr val="accent1"/>
+          </a:lnRef>
+          <a:fillRef idx="3">
+            <a:schemeClr val="accent1"/>
+          </a:fillRef>
+          <a:effectRef idx="2">
+            <a:schemeClr val="accent1"/>
+          </a:effectRef>
+          <a:fontRef idx="minor">
+            <a:schemeClr val="lt1"/>
+          </a:fontRef>
+        </p:style>
+        <p:txBody>
+          <a:bodyPr rtlCol="0" anchor="ctr"/>
+          <a:lstStyle/>
+          <a:p/>
+        </p:txBody>
+      </p:sp>
+      <p:sp>
+        <p:nvSpPr>
+          <p:cNvPr id="10" name="TextBox 9"/>
+          <p:cNvSpPr txBox="1"/>
+          <p:nvPr/>
+        </p:nvSpPr>
+        <p:spPr>
+          <a:xfrm>
+            <a:off x="8275320" y="1965960"/>
+            <a:ext cx="3154680" cy="2743200"/>
+          </a:xfrm>
+          <a:prstGeom prst="rect">
+            <a:avLst/>
+          </a:prstGeom>
+          <a:noFill/>
+        </p:spPr>
+        <p:txBody>
+          <a:bodyPr wrap="square" lIns="0" rIns="0" tIns="0" bIns="0" anchor="t">
+            <a:spAutoFit/>
+          </a:bodyPr>
+          <a:lstStyle/>
+          <a:p>
+            <a:pPr algn="l">
+              <a:spcAft>
+                <a:spcPts val="800"/>
+              </a:spcAft>
+            </a:pPr>
+            <a:r>
+              <a:rPr sz="1300" b="1" i="0">
+                <a:solidFill>
+                  <a:srgbClr val="C59BFF"/>
+                </a:solidFill>
+                <a:latin typeface="Calibri"/>
+              </a:rPr>
+              <a:t>SIGUIENTE GUÍA</a:t>
+            </a:r>
+          </a:p>
+          <a:p>
+            <a:pPr algn="l">
+              <a:spcAft>
+                <a:spcPts val="800"/>
+              </a:spcAft>
+            </a:pPr>
+            <a:r>
+              <a:rPr sz="2600" b="1" i="0">
+                <a:solidFill>
+                  <a:srgbClr val="E9EEFB"/>
+                </a:solidFill>
+                <a:latin typeface="Cambria"/>
+              </a:rPr>
+              <a:t>28 de octubre</a:t>
+            </a:r>
+          </a:p>
+          <a:p>
+            <a:pPr algn="l">
+              <a:spcAft>
+                <a:spcPts val="800"/>
+              </a:spcAft>
+            </a:pPr>
+            <a:r>
+              <a:rPr sz="1500" b="0" i="0">
+                <a:solidFill>
+                  <a:srgbClr val="94A4C6"/>
+                </a:solidFill>
+                <a:latin typeface="Calibri"/>
+              </a:rPr>
+              <a:t>La mecánica central de tu juego: el pincel y la zona en 10.1, las notas al ritmo en 10.2.</a:t>
+            </a:r>
+          </a:p>
+        </p:txBody>
+      </p:sp>
+      <p:sp>
+        <p:nvSpPr>
+          <p:cNvPr id="11" name="Pie"/>
+          <p:cNvSpPr txBox="1"/>
+          <p:nvPr/>
+        </p:nvSpPr>
+        <p:spPr>
+          <a:xfrm>
+            <a:off x="548640" y="6400800"/>
+            <a:ext cx="11064240" cy="274320"/>
+          </a:xfrm>
+          <a:prstGeom prst="rect">
+            <a:avLst/>
+          </a:prstGeom>
+          <a:noFill/>
+        </p:spPr>
+        <p:txBody>
+          <a:bodyPr wrap="square" lIns="0" rIns="0" tIns="0" bIns="0" anchor="t">
+            <a:spAutoFit/>
+          </a:bodyPr>
+          <a:lstStyle/>
+          <a:p>
+            <a:pPr algn="r">
+              <a:spcAft>
+                <a:spcPts val="600"/>
+              </a:spcAft>
+            </a:pPr>
+            <a:r>
+              <a:rPr sz="1100" b="0" i="0">
+                <a:solidFill>
+                  <a:srgbClr val="94A4C6"/>
+                </a:solidFill>
+                <a:latin typeface="Calibri"/>
+              </a:rPr>
+              <a:t>Guía 0 · Preparar Unity  ·  11 de 11</a:t>
             </a:r>
           </a:p>
         </p:txBody>
@@ -5686,7 +7169,7 @@
                 </a:solidFill>
                 <a:latin typeface="Calibri"/>
               </a:rPr>
-              <a:t>Guía 0 · Preparar Unity  ·  2 de 9</a:t>
+              <a:t>Guía 0 · Preparar Unity  ·  2 de 11</a:t>
             </a:r>
           </a:p>
         </p:txBody>
@@ -6749,7 +8232,7 @@
                 </a:solidFill>
                 <a:latin typeface="Calibri"/>
               </a:rPr>
-              <a:t>Guía 0 · Preparar Unity  ·  3 de 9</a:t>
+              <a:t>Guía 0 · Preparar Unity  ·  3 de 11</a:t>
             </a:r>
           </a:p>
         </p:txBody>
@@ -7917,7 +9400,7 @@
                 </a:solidFill>
                 <a:latin typeface="Calibri"/>
               </a:rPr>
-              <a:t>Guía 0 · Preparar Unity  ·  4 de 9</a:t>
+              <a:t>Guía 0 · Preparar Unity  ·  4 de 11</a:t>
             </a:r>
           </a:p>
         </p:txBody>
@@ -9481,7 +10964,7 @@
                 </a:solidFill>
                 <a:latin typeface="Calibri"/>
               </a:rPr>
-              <a:t>Guía 0 · Preparar Unity  ·  5 de 9</a:t>
+              <a:t>Guía 0 · Preparar Unity  ·  5 de 11</a:t>
             </a:r>
           </a:p>
         </p:txBody>
@@ -10549,7 +12032,7 @@
                 </a:solidFill>
                 <a:latin typeface="Calibri"/>
               </a:rPr>
-              <a:t>Guía 0 · Preparar Unity  ·  6 de 9</a:t>
+              <a:t>Guía 0 · Preparar Unity  ·  6 de 11</a:t>
             </a:r>
           </a:p>
         </p:txBody>
@@ -10653,7 +12136,7 @@
                 </a:solidFill>
                 <a:latin typeface="Cambria"/>
               </a:rPr>
-              <a:t>Paso 5 · Importar el kit y hacer la prueba</a:t>
+              <a:t>Paso 5 (1 de 3) · Conseguir el kit en tu computador</a:t>
             </a:r>
           </a:p>
         </p:txBody>
@@ -10739,26 +12222,154 @@
               </a:spcAft>
             </a:pPr>
             <a:r>
-              <a:rPr sz="1600" b="0" i="0">
+              <a:rPr sz="1500" b="0" i="0">
                 <a:solidFill>
                   <a:srgbClr val="0A0E1A"/>
                 </a:solidFill>
                 <a:latin typeface="Calibri"/>
               </a:rPr>
-              <a:t>Descarga de la carpeta del equipo en Drive el paquete de tu juego:</a:t>
-            </a:r>
-          </a:p>
-        </p:txBody>
-      </p:sp>
-      <p:sp>
-        <p:nvSpPr>
-          <p:cNvPr id="6" name="Rounded Rectangle 5"/>
+              <a:t>Abre en Drive la carpeta de tu equipo y entra a </a:t>
+            </a:r>
+            <a:r>
+              <a:rPr sz="1500" b="1" i="0">
+                <a:solidFill>
+                  <a:srgbClr val="0A0E1A"/>
+                </a:solidFill>
+                <a:latin typeface="Calibri"/>
+              </a:rPr>
+              <a:t>H) 21 y 22 de octubre</a:t>
+            </a:r>
+            <a:r>
+              <a:rPr sz="1500" b="0" i="0">
+                <a:solidFill>
+                  <a:srgbClr val="0A0E1A"/>
+                </a:solidFill>
+                <a:latin typeface="Calibri"/>
+              </a:rPr>
+              <a:t>.</a:t>
+            </a:r>
+          </a:p>
+        </p:txBody>
+      </p:sp>
+      <p:sp>
+        <p:nvSpPr>
+          <p:cNvPr id="6" name="Oval 5"/>
           <p:cNvSpPr/>
           <p:nvPr/>
         </p:nvSpPr>
         <p:spPr>
           <a:xfrm>
-            <a:off x="1051560" y="2212848"/>
+            <a:off x="548640" y="2304288"/>
+            <a:ext cx="347472" cy="347472"/>
+          </a:xfrm>
+          <a:prstGeom prst="ellipse">
+            <a:avLst/>
+          </a:prstGeom>
+          <a:solidFill>
+            <a:srgbClr val="7317C9"/>
+          </a:solidFill>
+          <a:ln>
+            <a:noFill/>
+          </a:ln>
+          <a:effectLst/>
+        </p:spPr>
+        <p:style>
+          <a:lnRef idx="1">
+            <a:schemeClr val="accent1"/>
+          </a:lnRef>
+          <a:fillRef idx="3">
+            <a:schemeClr val="accent1"/>
+          </a:fillRef>
+          <a:effectRef idx="2">
+            <a:schemeClr val="accent1"/>
+          </a:effectRef>
+          <a:fontRef idx="minor">
+            <a:schemeClr val="lt1"/>
+          </a:fontRef>
+        </p:style>
+        <p:txBody>
+          <a:bodyPr rtlCol="0" anchor="ctr" lIns="0" rIns="0" tIns="0" bIns="0"/>
+          <a:lstStyle/>
+          <a:p>
+            <a:pPr algn="ctr"/>
+            <a:r>
+              <a:rPr sz="1300" b="1">
+                <a:solidFill>
+                  <a:srgbClr val="FFFFFF"/>
+                </a:solidFill>
+                <a:latin typeface="Calibri"/>
+              </a:rPr>
+              <a:t>2</a:t>
+            </a:r>
+          </a:p>
+        </p:txBody>
+      </p:sp>
+      <p:sp>
+        <p:nvSpPr>
+          <p:cNvPr id="7" name="TextBox 6"/>
+          <p:cNvSpPr txBox="1"/>
+          <p:nvPr/>
+        </p:nvSpPr>
+        <p:spPr>
+          <a:xfrm>
+            <a:off x="1051560" y="2322576"/>
+            <a:ext cx="5532120" cy="502920"/>
+          </a:xfrm>
+          <a:prstGeom prst="rect">
+            <a:avLst/>
+          </a:prstGeom>
+          <a:noFill/>
+        </p:spPr>
+        <p:txBody>
+          <a:bodyPr wrap="square" lIns="0" rIns="0" tIns="0" bIns="0" anchor="t">
+            <a:spAutoFit/>
+          </a:bodyPr>
+          <a:lstStyle/>
+          <a:p>
+            <a:pPr algn="l">
+              <a:spcAft>
+                <a:spcPts val="600"/>
+              </a:spcAft>
+            </a:pPr>
+            <a:r>
+              <a:rPr sz="1500" b="0" i="0">
+                <a:solidFill>
+                  <a:srgbClr val="0A0E1A"/>
+                </a:solidFill>
+                <a:latin typeface="Calibri"/>
+              </a:rPr>
+              <a:t>Descarga el archivo de tu juego con clic derecho &gt; </a:t>
+            </a:r>
+            <a:r>
+              <a:rPr sz="1500" b="1" i="0">
+                <a:solidFill>
+                  <a:srgbClr val="0A0E1A"/>
+                </a:solidFill>
+                <a:latin typeface="Calibri"/>
+              </a:rPr>
+              <a:t>Descargar</a:t>
+            </a:r>
+            <a:r>
+              <a:rPr sz="1500" b="0" i="0">
+                <a:solidFill>
+                  <a:srgbClr val="0A0E1A"/>
+                </a:solidFill>
+                <a:latin typeface="Calibri"/>
+              </a:rPr>
+              <a:t>:</a:t>
+            </a:r>
+          </a:p>
+        </p:txBody>
+      </p:sp>
+      <p:sp>
+        <p:nvSpPr>
+          <p:cNvPr id="8" name="Rounded Rectangle 7"/>
+          <p:cNvSpPr/>
+          <p:nvPr/>
+        </p:nvSpPr>
+        <p:spPr>
+          <a:xfrm>
+            <a:off x="1051560" y="2971800"/>
             <a:ext cx="5532120" cy="868680"/>
           </a:xfrm>
           <a:prstGeom prst="roundRect">
@@ -10796,13 +12407,13 @@
       </p:sp>
       <p:sp>
         <p:nvSpPr>
-          <p:cNvPr id="7" name="TextBox 6"/>
+          <p:cNvPr id="9" name="TextBox 8"/>
           <p:cNvSpPr txBox="1"/>
           <p:nvPr/>
         </p:nvSpPr>
         <p:spPr>
           <a:xfrm>
-            <a:off x="1280160" y="2395728"/>
+            <a:off x="1280160" y="3154680"/>
             <a:ext cx="5074920" cy="594359"/>
           </a:xfrm>
           <a:prstGeom prst="rect">
@@ -10822,13 +12433,13 @@
               </a:spcAft>
             </a:pPr>
             <a:r>
-              <a:rPr sz="1400" b="0" i="0">
+              <a:rPr sz="1200" b="0" i="0">
                 <a:solidFill>
                   <a:srgbClr val="E9EEFB"/>
                 </a:solidFill>
                 <a:latin typeface="Consolas"/>
               </a:rPr>
-              <a:t>10.1  KitEquipo10_Motricidad.unitypackage</a:t>
+              <a:t>10.1  KitEquipo10_Motricidad.unitypackage   7,8 MB</a:t>
             </a:r>
           </a:p>
           <a:p>
@@ -10838,26 +12449,26 @@
               </a:spcAft>
             </a:pPr>
             <a:r>
-              <a:rPr sz="1400" b="0" i="0">
+              <a:rPr sz="1200" b="0" i="0">
                 <a:solidFill>
                   <a:srgbClr val="E9EEFB"/>
                 </a:solidFill>
                 <a:latin typeface="Consolas"/>
               </a:rPr>
-              <a:t>10.2  KitEquipo10_Ritmo.unitypackage</a:t>
-            </a:r>
-          </a:p>
-        </p:txBody>
-      </p:sp>
-      <p:sp>
-        <p:nvSpPr>
-          <p:cNvPr id="8" name="Oval 7"/>
+              <a:t>10.2  KitEquipo10_Ritmo.unitypackage        7,5 MB</a:t>
+            </a:r>
+          </a:p>
+        </p:txBody>
+      </p:sp>
+      <p:sp>
+        <p:nvSpPr>
+          <p:cNvPr id="10" name="Oval 9"/>
           <p:cNvSpPr/>
           <p:nvPr/>
         </p:nvSpPr>
         <p:spPr>
           <a:xfrm>
-            <a:off x="548640" y="3291840"/>
+            <a:off x="548640" y="4023360"/>
             <a:ext cx="347472" cy="347472"/>
           </a:xfrm>
           <a:prstGeom prst="ellipse">
@@ -10897,20 +12508,20 @@
                 </a:solidFill>
                 <a:latin typeface="Calibri"/>
               </a:rPr>
-              <a:t>2</a:t>
-            </a:r>
-          </a:p>
-        </p:txBody>
-      </p:sp>
-      <p:sp>
-        <p:nvSpPr>
-          <p:cNvPr id="9" name="TextBox 8"/>
+              <a:t>3</a:t>
+            </a:r>
+          </a:p>
+        </p:txBody>
+      </p:sp>
+      <p:sp>
+        <p:nvSpPr>
+          <p:cNvPr id="11" name="TextBox 10"/>
           <p:cNvSpPr txBox="1"/>
           <p:nvPr/>
         </p:nvSpPr>
         <p:spPr>
           <a:xfrm>
-            <a:off x="1051560" y="3310128"/>
+            <a:off x="1051560" y="4041648"/>
             <a:ext cx="5532120" cy="502920"/>
           </a:xfrm>
           <a:prstGeom prst="rect">
@@ -10930,35 +12541,44 @@
               </a:spcAft>
             </a:pPr>
             <a:r>
-              <a:rPr sz="1600" b="0" i="0">
+              <a:rPr sz="1500" b="0" i="0">
                 <a:solidFill>
                   <a:srgbClr val="0A0E1A"/>
                 </a:solidFill>
                 <a:latin typeface="Calibri"/>
               </a:rPr>
-              <a:t>En Unity: </a:t>
-            </a:r>
-            <a:r>
-              <a:rPr sz="1600" b="1" i="0">
+              <a:t>Crea la carpeta </a:t>
+            </a:r>
+            <a:r>
+              <a:rPr sz="1400" b="1" i="0">
                 <a:solidFill>
                   <a:srgbClr val="0A0E1A"/>
                 </a:solidFill>
-                <a:latin typeface="Calibri"/>
-              </a:rPr>
-              <a:t>Assets &gt; Import Package &gt; Custom Package...</a:t>
-            </a:r>
-          </a:p>
-        </p:txBody>
-      </p:sp>
-      <p:sp>
-        <p:nvSpPr>
-          <p:cNvPr id="10" name="Oval 9"/>
+                <a:latin typeface="Consolas"/>
+              </a:rPr>
+              <a:t>C:\Unity\Kit</a:t>
+            </a:r>
+            <a:r>
+              <a:rPr sz="1500" b="0" i="0">
+                <a:solidFill>
+                  <a:srgbClr val="0A0E1A"/>
+                </a:solidFill>
+                <a:latin typeface="Calibri"/>
+              </a:rPr>
+              <a:t> y guarda ahí el archivo, fuera de la carpeta del proyecto.</a:t>
+            </a:r>
+          </a:p>
+        </p:txBody>
+      </p:sp>
+      <p:sp>
+        <p:nvSpPr>
+          <p:cNvPr id="12" name="Oval 11"/>
           <p:cNvSpPr/>
           <p:nvPr/>
         </p:nvSpPr>
         <p:spPr>
           <a:xfrm>
-            <a:off x="548640" y="3895344"/>
+            <a:off x="548640" y="4773168"/>
             <a:ext cx="347472" cy="347472"/>
           </a:xfrm>
           <a:prstGeom prst="ellipse">
@@ -10998,20 +12618,20 @@
                 </a:solidFill>
                 <a:latin typeface="Calibri"/>
               </a:rPr>
-              <a:t>3</a:t>
-            </a:r>
-          </a:p>
-        </p:txBody>
-      </p:sp>
-      <p:sp>
-        <p:nvSpPr>
-          <p:cNvPr id="11" name="TextBox 10"/>
+              <a:t>4</a:t>
+            </a:r>
+          </a:p>
+        </p:txBody>
+      </p:sp>
+      <p:sp>
+        <p:nvSpPr>
+          <p:cNvPr id="13" name="TextBox 12"/>
           <p:cNvSpPr txBox="1"/>
           <p:nvPr/>
         </p:nvSpPr>
         <p:spPr>
           <a:xfrm>
-            <a:off x="1051560" y="3913631"/>
+            <a:off x="1051560" y="4791456"/>
             <a:ext cx="5532120" cy="502920"/>
           </a:xfrm>
           <a:prstGeom prst="rect">
@@ -11031,54 +12651,58 @@
               </a:spcAft>
             </a:pPr>
             <a:r>
-              <a:rPr sz="1600" b="0" i="0">
+              <a:rPr sz="1500" b="0" i="0">
                 <a:solidFill>
                   <a:srgbClr val="0A0E1A"/>
                 </a:solidFill>
                 <a:latin typeface="Calibri"/>
               </a:rPr>
-              <a:t>Elige el archivo y pulsa </a:t>
-            </a:r>
-            <a:r>
-              <a:rPr sz="1600" b="1" i="0">
+              <a:t>Abre tu proyecto desde Unity Hub, en </a:t>
+            </a:r>
+            <a:r>
+              <a:rPr sz="1500" b="1" i="0">
                 <a:solidFill>
                   <a:srgbClr val="0A0E1A"/>
                 </a:solidFill>
                 <a:latin typeface="Calibri"/>
               </a:rPr>
-              <a:t>Import</a:t>
-            </a:r>
-            <a:r>
-              <a:rPr sz="1600" b="0" i="0">
+              <a:t>Projects</a:t>
+            </a:r>
+            <a:r>
+              <a:rPr sz="1500" b="0" i="0">
                 <a:solidFill>
                   <a:srgbClr val="0A0E1A"/>
                 </a:solidFill>
                 <a:latin typeface="Calibri"/>
               </a:rPr>
-              <a:t>. No desmarques nada.</a:t>
-            </a:r>
-          </a:p>
-        </p:txBody>
-      </p:sp>
-      <p:sp>
-        <p:nvSpPr>
-          <p:cNvPr id="12" name="Oval 11"/>
+              <a:t>.</a:t>
+            </a:r>
+          </a:p>
+        </p:txBody>
+      </p:sp>
+      <p:sp>
+        <p:nvSpPr>
+          <p:cNvPr id="14" name="Rounded Rectangle 13"/>
           <p:cNvSpPr/>
           <p:nvPr/>
         </p:nvSpPr>
         <p:spPr>
           <a:xfrm>
-            <a:off x="548640" y="4498848"/>
-            <a:ext cx="347472" cy="347472"/>
-          </a:xfrm>
-          <a:prstGeom prst="ellipse">
-            <a:avLst/>
+            <a:off x="7040880" y="1645920"/>
+            <a:ext cx="4617720" cy="2514600"/>
+          </a:xfrm>
+          <a:prstGeom prst="roundRect">
+            <a:avLst>
+              <a:gd name="adj" fmla="val 6000"/>
+            </a:avLst>
           </a:prstGeom>
           <a:solidFill>
-            <a:srgbClr val="7317C9"/>
+            <a:srgbClr val="FFFFFF"/>
           </a:solidFill>
-          <a:ln>
-            <a:noFill/>
+          <a:ln w="12700">
+            <a:solidFill>
+              <a:srgbClr val="D2DAE9"/>
+            </a:solidFill>
           </a:ln>
           <a:effectLst/>
         </p:spPr>
@@ -11097,32 +12721,21 @@
           </a:fontRef>
         </p:style>
         <p:txBody>
-          <a:bodyPr rtlCol="0" anchor="ctr" lIns="0" rIns="0" tIns="0" bIns="0"/>
-          <a:lstStyle/>
-          <a:p>
-            <a:pPr algn="ctr"/>
-            <a:r>
-              <a:rPr sz="1300" b="1">
-                <a:solidFill>
-                  <a:srgbClr val="FFFFFF"/>
-                </a:solidFill>
-                <a:latin typeface="Calibri"/>
-              </a:rPr>
-              <a:t>4</a:t>
-            </a:r>
-          </a:p>
-        </p:txBody>
-      </p:sp>
-      <p:sp>
-        <p:nvSpPr>
-          <p:cNvPr id="13" name="TextBox 12"/>
+          <a:bodyPr rtlCol="0" anchor="ctr"/>
+          <a:lstStyle/>
+          <a:p/>
+        </p:txBody>
+      </p:sp>
+      <p:sp>
+        <p:nvSpPr>
+          <p:cNvPr id="15" name="TextBox 14"/>
           <p:cNvSpPr txBox="1"/>
           <p:nvPr/>
         </p:nvSpPr>
         <p:spPr>
           <a:xfrm>
-            <a:off x="1051560" y="4517136"/>
-            <a:ext cx="5532120" cy="502920"/>
+            <a:off x="7269480" y="1783080"/>
+            <a:ext cx="4206240" cy="365760"/>
           </a:xfrm>
           <a:prstGeom prst="rect">
             <a:avLst/>
@@ -11141,98 +12754,27 @@
               </a:spcAft>
             </a:pPr>
             <a:r>
-              <a:rPr sz="1600" b="0" i="0">
+              <a:rPr sz="1600" b="1" i="0">
                 <a:solidFill>
                   <a:srgbClr val="0A0E1A"/>
                 </a:solidFill>
                 <a:latin typeface="Calibri"/>
               </a:rPr>
-              <a:t>En Project abre </a:t>
-            </a:r>
-            <a:r>
-              <a:rPr sz="1600" b="1" i="0">
-                <a:solidFill>
-                  <a:srgbClr val="0A0E1A"/>
-                </a:solidFill>
-                <a:latin typeface="Calibri"/>
-              </a:rPr>
-              <a:t>KitEquipo10 &gt; Escenas</a:t>
-            </a:r>
-            <a:r>
-              <a:rPr sz="1600" b="0" i="0">
-                <a:solidFill>
-                  <a:srgbClr val="0A0E1A"/>
-                </a:solidFill>
-                <a:latin typeface="Calibri"/>
-              </a:rPr>
-              <a:t> y haz doble clic en 00_PruebaDelKit.</a:t>
-            </a:r>
-          </a:p>
-        </p:txBody>
-      </p:sp>
-      <p:sp>
-        <p:nvSpPr>
-          <p:cNvPr id="14" name="Oval 13"/>
-          <p:cNvSpPr/>
-          <p:nvPr/>
-        </p:nvSpPr>
-        <p:spPr>
-          <a:xfrm>
-            <a:off x="548640" y="5102352"/>
-            <a:ext cx="347472" cy="347472"/>
-          </a:xfrm>
-          <a:prstGeom prst="ellipse">
-            <a:avLst/>
-          </a:prstGeom>
-          <a:solidFill>
-            <a:srgbClr val="7317C9"/>
-          </a:solidFill>
-          <a:ln>
-            <a:noFill/>
-          </a:ln>
-          <a:effectLst/>
-        </p:spPr>
-        <p:style>
-          <a:lnRef idx="1">
-            <a:schemeClr val="accent1"/>
-          </a:lnRef>
-          <a:fillRef idx="3">
-            <a:schemeClr val="accent1"/>
-          </a:fillRef>
-          <a:effectRef idx="2">
-            <a:schemeClr val="accent1"/>
-          </a:effectRef>
-          <a:fontRef idx="minor">
-            <a:schemeClr val="lt1"/>
-          </a:fontRef>
-        </p:style>
-        <p:txBody>
-          <a:bodyPr rtlCol="0" anchor="ctr" lIns="0" rIns="0" tIns="0" bIns="0"/>
-          <a:lstStyle/>
-          <a:p>
-            <a:pPr algn="ctr"/>
-            <a:r>
-              <a:rPr sz="1300" b="1">
-                <a:solidFill>
-                  <a:srgbClr val="FFFFFF"/>
-                </a:solidFill>
-                <a:latin typeface="Calibri"/>
-              </a:rPr>
-              <a:t>5</a:t>
-            </a:r>
-          </a:p>
-        </p:txBody>
-      </p:sp>
-      <p:sp>
-        <p:nvSpPr>
-          <p:cNvPr id="15" name="TextBox 14"/>
+              <a:t>Qué hay en cada carpeta de Drive</a:t>
+            </a:r>
+          </a:p>
+        </p:txBody>
+      </p:sp>
+      <p:sp>
+        <p:nvSpPr>
+          <p:cNvPr id="16" name="TextBox 15"/>
           <p:cNvSpPr txBox="1"/>
           <p:nvPr/>
         </p:nvSpPr>
         <p:spPr>
           <a:xfrm>
-            <a:off x="1051560" y="5120640"/>
-            <a:ext cx="5532120" cy="502920"/>
+            <a:off x="7269480" y="2240280"/>
+            <a:ext cx="4251960" cy="1874519"/>
           </a:xfrm>
           <a:prstGeom prst="rect">
             <a:avLst/>
@@ -11247,203 +12789,90 @@
           <a:p>
             <a:pPr algn="l">
               <a:spcAft>
-                <a:spcPts val="600"/>
-              </a:spcAft>
-            </a:pPr>
-            <a:r>
-              <a:rPr sz="1600" b="0" i="0">
+                <a:spcPts val="900"/>
+              </a:spcAft>
+            </a:pPr>
+            <a:r>
+              <a:rPr sz="1200" b="1" i="0">
                 <a:solidFill>
                   <a:srgbClr val="0A0E1A"/>
                 </a:solidFill>
-                <a:latin typeface="Calibri"/>
-              </a:rPr>
-              <a:t>Pulsa </a:t>
-            </a:r>
-            <a:r>
-              <a:rPr sz="1600" b="1" i="0">
+                <a:latin typeface="Consolas"/>
+              </a:rPr>
+              <a:t>H) 21 y 22 de octubre</a:t>
+            </a:r>
+            <a:r>
+              <a:rPr sz="1300" b="0" i="0">
                 <a:solidFill>
                   <a:srgbClr val="0A0E1A"/>
                 </a:solidFill>
                 <a:latin typeface="Calibri"/>
               </a:rPr>
-              <a:t>▶ Play</a:t>
-            </a:r>
-            <a:r>
-              <a:rPr sz="1600" b="0" i="0">
+              <a:t>  el kit, esta guía, los scripts para leer y el LEEME</a:t>
+            </a:r>
+          </a:p>
+          <a:p>
+            <a:pPr algn="l">
+              <a:spcAft>
+                <a:spcPts val="900"/>
+              </a:spcAft>
+            </a:pPr>
+            <a:r>
+              <a:rPr sz="1200" b="1" i="0">
                 <a:solidFill>
                   <a:srgbClr val="0A0E1A"/>
                 </a:solidFill>
-                <a:latin typeface="Calibri"/>
-              </a:rPr>
-              <a:t> arriba en el centro.</a:t>
-            </a:r>
-          </a:p>
-        </p:txBody>
-      </p:sp>
-      <p:sp>
-        <p:nvSpPr>
-          <p:cNvPr id="16" name="Rounded Rectangle 15"/>
+                <a:latin typeface="Consolas"/>
+              </a:rPr>
+              <a:t>I) 28 y 29 de octubre</a:t>
+            </a:r>
+            <a:r>
+              <a:rPr sz="1300" b="0" i="0">
+                <a:solidFill>
+                  <a:srgbClr val="0A0E1A"/>
+                </a:solidFill>
+                <a:latin typeface="Calibri"/>
+              </a:rPr>
+              <a:t>  la Guía 1: armar el juego</a:t>
+            </a:r>
+          </a:p>
+          <a:p>
+            <a:pPr algn="l">
+              <a:spcAft>
+                <a:spcPts val="900"/>
+              </a:spcAft>
+            </a:pPr>
+            <a:r>
+              <a:rPr sz="1200" b="1" i="0">
+                <a:solidFill>
+                  <a:srgbClr val="0A0E1A"/>
+                </a:solidFill>
+                <a:latin typeface="Consolas"/>
+              </a:rPr>
+              <a:t>J) 31 de oct al 13 de nov</a:t>
+            </a:r>
+            <a:r>
+              <a:rPr sz="1300" b="0" i="0">
+                <a:solidFill>
+                  <a:srgbClr val="0A0E1A"/>
+                </a:solidFill>
+                <a:latin typeface="Calibri"/>
+              </a:rPr>
+              <a:t>  la Guía 2: probar y publicar</a:t>
+            </a:r>
+          </a:p>
+        </p:txBody>
+      </p:sp>
+      <p:sp>
+        <p:nvSpPr>
+          <p:cNvPr id="17" name="Rounded Rectangle 16"/>
           <p:cNvSpPr/>
           <p:nvPr/>
         </p:nvSpPr>
         <p:spPr>
           <a:xfrm>
-            <a:off x="7040880" y="1645920"/>
-            <a:ext cx="4617720" cy="3017520"/>
-          </a:xfrm>
-          <a:prstGeom prst="roundRect">
-            <a:avLst>
-              <a:gd name="adj" fmla="val 3000"/>
-            </a:avLst>
-          </a:prstGeom>
-          <a:solidFill>
-            <a:srgbClr val="1E1E1E"/>
-          </a:solidFill>
-          <a:ln>
-            <a:noFill/>
-          </a:ln>
-          <a:effectLst/>
-        </p:spPr>
-        <p:style>
-          <a:lnRef idx="1">
-            <a:schemeClr val="accent1"/>
-          </a:lnRef>
-          <a:fillRef idx="3">
-            <a:schemeClr val="accent1"/>
-          </a:fillRef>
-          <a:effectRef idx="2">
-            <a:schemeClr val="accent1"/>
-          </a:effectRef>
-          <a:fontRef idx="minor">
-            <a:schemeClr val="lt1"/>
-          </a:fontRef>
-        </p:style>
-        <p:txBody>
-          <a:bodyPr rtlCol="0" anchor="ctr"/>
-          <a:lstStyle/>
-          <a:p/>
-        </p:txBody>
-      </p:sp>
-      <p:sp>
-        <p:nvSpPr>
-          <p:cNvPr id="17" name="TextBox 16"/>
-          <p:cNvSpPr txBox="1"/>
-          <p:nvPr/>
-        </p:nvSpPr>
-        <p:spPr>
-          <a:xfrm>
-            <a:off x="7223760" y="1737360"/>
-            <a:ext cx="1828800" cy="274320"/>
-          </a:xfrm>
-          <a:prstGeom prst="rect">
-            <a:avLst/>
-          </a:prstGeom>
-          <a:noFill/>
-        </p:spPr>
-        <p:txBody>
-          <a:bodyPr wrap="square" lIns="0" rIns="0" tIns="0" bIns="0" anchor="t">
-            <a:spAutoFit/>
-          </a:bodyPr>
-          <a:lstStyle/>
-          <a:p>
-            <a:pPr algn="l">
-              <a:spcAft>
-                <a:spcPts val="600"/>
-              </a:spcAft>
-            </a:pPr>
-            <a:r>
-              <a:rPr sz="1100" b="0" i="0">
-                <a:solidFill>
-                  <a:srgbClr val="BBBBBB"/>
-                </a:solidFill>
-                <a:latin typeface="Calibri"/>
-              </a:rPr>
-              <a:t>Game</a:t>
-            </a:r>
-          </a:p>
-        </p:txBody>
-      </p:sp>
-      <p:sp>
-        <p:nvSpPr>
-          <p:cNvPr id="18" name="TextBox 17"/>
-          <p:cNvSpPr txBox="1"/>
-          <p:nvPr/>
-        </p:nvSpPr>
-        <p:spPr>
-          <a:xfrm>
-            <a:off x="7223760" y="2240280"/>
-            <a:ext cx="4251960" cy="2194560"/>
-          </a:xfrm>
-          <a:prstGeom prst="rect">
-            <a:avLst/>
-          </a:prstGeom>
-          <a:noFill/>
-        </p:spPr>
-        <p:txBody>
-          <a:bodyPr wrap="square" lIns="0" rIns="0" tIns="0" bIns="0" anchor="t">
-            <a:spAutoFit/>
-          </a:bodyPr>
-          <a:lstStyle/>
-          <a:p>
-            <a:pPr algn="ctr">
-              <a:spcAft>
-                <a:spcPts val="600"/>
-              </a:spcAft>
-            </a:pPr>
-            <a:r>
-              <a:rPr sz="2600" b="1" i="0">
-                <a:solidFill>
-                  <a:srgbClr val="4FE39A"/>
-                </a:solidFill>
-                <a:latin typeface="Calibri"/>
-              </a:rPr>
-              <a:t>Kit listo</a:t>
-            </a:r>
-          </a:p>
-          <a:p>
-            <a:pPr algn="ctr">
-              <a:spcAft>
-                <a:spcPts val="600"/>
-              </a:spcAft>
-            </a:pPr>
-            <a:r>
-              <a:rPr sz="1400" b="0" i="0">
-                <a:solidFill>
-                  <a:srgbClr val="4FE39A"/>
-                </a:solidFill>
-                <a:latin typeface="Calibri"/>
-              </a:rPr>
-              <a:t>Unity 2019.4.38f1  ·  versión correcta</a:t>
-            </a:r>
-          </a:p>
-          <a:p>
-            <a:pPr algn="ctr">
-              <a:spcAft>
-                <a:spcPts val="600"/>
-              </a:spcAft>
-            </a:pPr>
-            <a:r>
-              <a:rPr sz="1400" b="0" i="0">
-                <a:solidFill>
-                  <a:srgbClr val="4FE39A"/>
-                </a:solidFill>
-                <a:latin typeface="Calibri"/>
-              </a:rPr>
-              <a:t>Mano: Derecha  ·  Sensibilidad: x1</a:t>
-            </a:r>
-          </a:p>
-        </p:txBody>
-      </p:sp>
-      <p:sp>
-        <p:nvSpPr>
-          <p:cNvPr id="19" name="Rounded Rectangle 18"/>
-          <p:cNvSpPr/>
-          <p:nvPr/>
-        </p:nvSpPr>
-        <p:spPr>
-          <a:xfrm>
-            <a:off x="7040880" y="4846320"/>
-            <a:ext cx="4617720" cy="1417320"/>
+            <a:off x="7040880" y="4343400"/>
+            <a:ext cx="4617720" cy="1920240"/>
           </a:xfrm>
           <a:prstGeom prst="roundRect">
             <a:avLst>
@@ -11480,14 +12909,14 @@
       </p:sp>
       <p:sp>
         <p:nvSpPr>
-          <p:cNvPr id="20" name="TextBox 19"/>
+          <p:cNvPr id="18" name="TextBox 17"/>
           <p:cNvSpPr txBox="1"/>
           <p:nvPr/>
         </p:nvSpPr>
         <p:spPr>
           <a:xfrm>
-            <a:off x="7269480" y="5010912"/>
-            <a:ext cx="4160520" cy="1143000"/>
+            <a:off x="7269480" y="4507992"/>
+            <a:ext cx="4160520" cy="1645920"/>
           </a:xfrm>
           <a:prstGeom prst="rect">
             <a:avLst/>
@@ -11512,7 +12941,7 @@
                 </a:solidFill>
                 <a:latin typeface="Calibri"/>
               </a:rPr>
-              <a:t>!  Si sale en naranja o algo se queda quieto</a:t>
+              <a:t>!  No lo descomprimas</a:t>
             </a:r>
           </a:p>
           <a:p>
@@ -11528,30 +12957,14 @@
                 </a:solidFill>
                 <a:latin typeface="Calibri"/>
               </a:rPr>
-              <a:t>Naranja: es otra versión de Unity. Vuelve al paso 2.</a:t>
-            </a:r>
-          </a:p>
-          <a:p>
-            <a:pPr algn="l">
-              <a:spcAft>
-                <a:spcPts val="400"/>
-              </a:spcAft>
-            </a:pPr>
-            <a:r>
-              <a:rPr sz="1300" b="0" i="0">
-                <a:solidFill>
-                  <a:srgbClr val="0A0E1A"/>
-                </a:solidFill>
-                <a:latin typeface="Calibri"/>
-              </a:rPr>
-              <a:t>Si Windows pregunta por el Firewall, pulsa Cancelar: el kit no usa internet.</a:t>
-            </a:r>
-          </a:p>
-        </p:txBody>
-      </p:sp>
-      <p:sp>
-        <p:nvSpPr>
-          <p:cNvPr id="21" name="Rounded Rectangle 20"/>
+              <a:t>Un .unitypackage no es un zip: Unity lo abre tal cual. Si lo abres con un descompresor, no sirve para importar.</a:t>
+            </a:r>
+          </a:p>
+        </p:txBody>
+      </p:sp>
+      <p:sp>
+        <p:nvSpPr>
+          <p:cNvPr id="19" name="Rounded Rectangle 18"/>
           <p:cNvSpPr/>
           <p:nvPr/>
         </p:nvSpPr>
@@ -11595,7 +13008,7 @@
       </p:sp>
       <p:sp>
         <p:nvSpPr>
-          <p:cNvPr id="22" name="TextBox 21"/>
+          <p:cNvPr id="20" name="TextBox 19"/>
           <p:cNvSpPr txBox="1"/>
           <p:nvPr/>
         </p:nvSpPr>
@@ -11621,20 +13034,20 @@
               </a:spcAft>
             </a:pPr>
             <a:r>
-              <a:rPr sz="1400" b="1" i="0">
+              <a:rPr sz="1300" b="1" i="0">
                 <a:solidFill>
                   <a:srgbClr val="097A41"/>
                 </a:solidFill>
                 <a:latin typeface="Calibri"/>
               </a:rPr>
-              <a:t>✓  Con el letrero verde, la Fase 0 está completa.</a:t>
-            </a:r>
-          </a:p>
-        </p:txBody>
-      </p:sp>
-      <p:sp>
-        <p:nvSpPr>
-          <p:cNvPr id="23" name="Pie"/>
+              <a:t>✓  Cómo sabes que quedó: el archivo pesa unos 7,5 MB en C:\Unity\Kit.</a:t>
+            </a:r>
+          </a:p>
+        </p:txBody>
+      </p:sp>
+      <p:sp>
+        <p:nvSpPr>
+          <p:cNvPr id="21" name="Pie"/>
           <p:cNvSpPr txBox="1"/>
           <p:nvPr/>
         </p:nvSpPr>
@@ -11666,7 +13079,7 @@
                 </a:solidFill>
                 <a:latin typeface="Calibri"/>
               </a:rPr>
-              <a:t>Guía 0 · Preparar Unity  ·  7 de 9</a:t>
+              <a:t>Guía 0 · Preparar Unity  ·  7 de 11</a:t>
             </a:r>
           </a:p>
         </p:txBody>
@@ -11770,29 +13183,27 @@
                 </a:solidFill>
                 <a:latin typeface="Cambria"/>
               </a:rPr>
-              <a:t>Si la consola se pone roja, léela así</a:t>
-            </a:r>
-          </a:p>
-        </p:txBody>
-      </p:sp>
-      <p:sp>
-        <p:nvSpPr>
-          <p:cNvPr id="4" name="Rounded Rectangle 3"/>
+              <a:t>Paso 5 (2 de 3) · Importar el kit en tu proyecto</a:t>
+            </a:r>
+          </a:p>
+        </p:txBody>
+      </p:sp>
+      <p:sp>
+        <p:nvSpPr>
+          <p:cNvPr id="4" name="Oval 3"/>
           <p:cNvSpPr/>
           <p:nvPr/>
         </p:nvSpPr>
         <p:spPr>
           <a:xfrm>
             <a:off x="548640" y="1645920"/>
-            <a:ext cx="11109960" cy="640080"/>
-          </a:xfrm>
-          <a:prstGeom prst="roundRect">
-            <a:avLst>
-              <a:gd name="adj" fmla="val 5000"/>
-            </a:avLst>
+            <a:ext cx="347472" cy="347472"/>
+          </a:xfrm>
+          <a:prstGeom prst="ellipse">
+            <a:avLst/>
           </a:prstGeom>
           <a:solidFill>
-            <a:srgbClr val="0F1424"/>
+            <a:srgbClr val="7317C9"/>
           </a:solidFill>
           <a:ln>
             <a:noFill/>
@@ -11814,9 +13225,20 @@
           </a:fontRef>
         </p:style>
         <p:txBody>
-          <a:bodyPr rtlCol="0" anchor="ctr"/>
-          <a:lstStyle/>
-          <a:p/>
+          <a:bodyPr rtlCol="0" anchor="ctr" lIns="0" rIns="0" tIns="0" bIns="0"/>
+          <a:lstStyle/>
+          <a:p>
+            <a:pPr algn="ctr"/>
+            <a:r>
+              <a:rPr sz="1300" b="1">
+                <a:solidFill>
+                  <a:srgbClr val="FFFFFF"/>
+                </a:solidFill>
+                <a:latin typeface="Calibri"/>
+              </a:rPr>
+              <a:t>1</a:t>
+            </a:r>
+          </a:p>
         </p:txBody>
       </p:sp>
       <p:sp>
@@ -11827,8 +13249,8 @@
         </p:nvSpPr>
         <p:spPr>
           <a:xfrm>
-            <a:off x="777240" y="1828800"/>
-            <a:ext cx="10652760" cy="365759"/>
+            <a:off x="1051560" y="1664208"/>
+            <a:ext cx="5349240" cy="502920"/>
           </a:xfrm>
           <a:prstGeom prst="rect">
             <a:avLst/>
@@ -11843,156 +13265,46 @@
           <a:p>
             <a:pPr algn="l">
               <a:spcAft>
-                <a:spcPts val="200"/>
-              </a:spcAft>
-            </a:pPr>
-            <a:r>
-              <a:rPr sz="1600" b="0" i="0">
-                <a:solidFill>
-                  <a:srgbClr val="E9EEFB"/>
-                </a:solidFill>
-                <a:latin typeface="Consolas"/>
-              </a:rPr>
-              <a:t>Assets\Scripts\PlayerMovement.cs(23,26): error CS1525: Invalid expression term '}'</a:t>
-            </a:r>
-          </a:p>
-        </p:txBody>
-      </p:sp>
-      <p:sp>
-        <p:nvSpPr>
-          <p:cNvPr id="6" name="TextBox 5"/>
-          <p:cNvSpPr txBox="1"/>
-          <p:nvPr/>
-        </p:nvSpPr>
-        <p:spPr>
-          <a:xfrm>
-            <a:off x="777240" y="2377440"/>
-            <a:ext cx="2743200" cy="320040"/>
-          </a:xfrm>
-          <a:prstGeom prst="rect">
-            <a:avLst/>
-          </a:prstGeom>
-          <a:noFill/>
-        </p:spPr>
-        <p:txBody>
-          <a:bodyPr wrap="square" lIns="0" rIns="0" tIns="0" bIns="0" anchor="t">
-            <a:spAutoFit/>
-          </a:bodyPr>
-          <a:lstStyle/>
-          <a:p>
-            <a:pPr algn="l">
-              <a:spcAft>
                 <a:spcPts val="600"/>
               </a:spcAft>
             </a:pPr>
             <a:r>
-              <a:rPr sz="1300" b="1" i="0">
-                <a:solidFill>
-                  <a:srgbClr val="7317C9"/>
-                </a:solidFill>
-                <a:latin typeface="Calibri"/>
-              </a:rPr>
-              <a:t>▲ qué archivo</a:t>
-            </a:r>
-          </a:p>
-        </p:txBody>
-      </p:sp>
-      <p:sp>
-        <p:nvSpPr>
-          <p:cNvPr id="7" name="TextBox 6"/>
-          <p:cNvSpPr txBox="1"/>
-          <p:nvPr/>
-        </p:nvSpPr>
-        <p:spPr>
-          <a:xfrm>
-            <a:off x="4709160" y="2377440"/>
-            <a:ext cx="2194560" cy="320040"/>
-          </a:xfrm>
-          <a:prstGeom prst="rect">
-            <a:avLst/>
-          </a:prstGeom>
-          <a:noFill/>
-        </p:spPr>
-        <p:txBody>
-          <a:bodyPr wrap="square" lIns="0" rIns="0" tIns="0" bIns="0" anchor="t">
-            <a:spAutoFit/>
-          </a:bodyPr>
-          <a:lstStyle/>
-          <a:p>
-            <a:pPr algn="l">
-              <a:spcAft>
-                <a:spcPts val="600"/>
-              </a:spcAft>
-            </a:pPr>
-            <a:r>
-              <a:rPr sz="1300" b="1" i="0">
-                <a:solidFill>
-                  <a:srgbClr val="7317C9"/>
-                </a:solidFill>
-                <a:latin typeface="Calibri"/>
-              </a:rPr>
-              <a:t>▲ línea 23, columna 26</a:t>
-            </a:r>
-          </a:p>
-        </p:txBody>
-      </p:sp>
-      <p:sp>
-        <p:nvSpPr>
-          <p:cNvPr id="8" name="TextBox 7"/>
-          <p:cNvSpPr txBox="1"/>
-          <p:nvPr/>
-        </p:nvSpPr>
-        <p:spPr>
-          <a:xfrm>
-            <a:off x="6903720" y="2377440"/>
-            <a:ext cx="3200400" cy="320040"/>
-          </a:xfrm>
-          <a:prstGeom prst="rect">
-            <a:avLst/>
-          </a:prstGeom>
-          <a:noFill/>
-        </p:spPr>
-        <p:txBody>
-          <a:bodyPr wrap="square" lIns="0" rIns="0" tIns="0" bIns="0" anchor="t">
-            <a:spAutoFit/>
-          </a:bodyPr>
-          <a:lstStyle/>
-          <a:p>
-            <a:pPr algn="l">
-              <a:spcAft>
-                <a:spcPts val="600"/>
-              </a:spcAft>
-            </a:pPr>
-            <a:r>
-              <a:rPr sz="1300" b="1" i="0">
-                <a:solidFill>
-                  <a:srgbClr val="7317C9"/>
-                </a:solidFill>
-                <a:latin typeface="Calibri"/>
-              </a:rPr>
-              <a:t>▲ qué no entendió Unity</a:t>
-            </a:r>
-          </a:p>
-        </p:txBody>
-      </p:sp>
-      <p:sp>
-        <p:nvSpPr>
-          <p:cNvPr id="9" name="Rounded Rectangle 8"/>
+              <a:rPr sz="1500" b="0" i="0">
+                <a:solidFill>
+                  <a:srgbClr val="0A0E1A"/>
+                </a:solidFill>
+                <a:latin typeface="Calibri"/>
+              </a:rPr>
+              <a:t>Con tu proyecto abierto: </a:t>
+            </a:r>
+            <a:r>
+              <a:rPr sz="1500" b="1" i="0">
+                <a:solidFill>
+                  <a:srgbClr val="0A0E1A"/>
+                </a:solidFill>
+                <a:latin typeface="Calibri"/>
+              </a:rPr>
+              <a:t>Assets &gt; Import Package &gt; Custom Package...</a:t>
+            </a:r>
+          </a:p>
+        </p:txBody>
+      </p:sp>
+      <p:sp>
+        <p:nvSpPr>
+          <p:cNvPr id="6" name="Oval 5"/>
           <p:cNvSpPr/>
           <p:nvPr/>
         </p:nvSpPr>
         <p:spPr>
           <a:xfrm>
-            <a:off x="548640" y="2880360"/>
-            <a:ext cx="5760720" cy="1828800"/>
-          </a:xfrm>
-          <a:prstGeom prst="roundRect">
-            <a:avLst>
-              <a:gd name="adj" fmla="val 5000"/>
-            </a:avLst>
+            <a:off x="548640" y="2377440"/>
+            <a:ext cx="347472" cy="347472"/>
+          </a:xfrm>
+          <a:prstGeom prst="ellipse">
+            <a:avLst/>
           </a:prstGeom>
           <a:solidFill>
-            <a:srgbClr val="0F1424"/>
+            <a:srgbClr val="7317C9"/>
           </a:solidFill>
           <a:ln>
             <a:noFill/>
@@ -12014,21 +13326,32 @@
           </a:fontRef>
         </p:style>
         <p:txBody>
-          <a:bodyPr rtlCol="0" anchor="ctr"/>
-          <a:lstStyle/>
-          <a:p/>
-        </p:txBody>
-      </p:sp>
-      <p:sp>
-        <p:nvSpPr>
-          <p:cNvPr id="10" name="TextBox 9"/>
+          <a:bodyPr rtlCol="0" anchor="ctr" lIns="0" rIns="0" tIns="0" bIns="0"/>
+          <a:lstStyle/>
+          <a:p>
+            <a:pPr algn="ctr"/>
+            <a:r>
+              <a:rPr sz="1300" b="1">
+                <a:solidFill>
+                  <a:srgbClr val="FFFFFF"/>
+                </a:solidFill>
+                <a:latin typeface="Calibri"/>
+              </a:rPr>
+              <a:t>2</a:t>
+            </a:r>
+          </a:p>
+        </p:txBody>
+      </p:sp>
+      <p:sp>
+        <p:nvSpPr>
+          <p:cNvPr id="7" name="TextBox 6"/>
           <p:cNvSpPr txBox="1"/>
           <p:nvPr/>
         </p:nvSpPr>
         <p:spPr>
           <a:xfrm>
-            <a:off x="777240" y="3063240"/>
-            <a:ext cx="5303520" cy="1554480"/>
+            <a:off x="1051560" y="2395728"/>
+            <a:ext cx="5349240" cy="502920"/>
           </a:xfrm>
           <a:prstGeom prst="rect">
             <a:avLst/>
@@ -12043,156 +13366,76 @@
           <a:p>
             <a:pPr algn="l">
               <a:spcAft>
-                <a:spcPts val="200"/>
+                <a:spcPts val="600"/>
               </a:spcAft>
             </a:pPr>
             <a:r>
               <a:rPr sz="1500" b="0" i="0">
                 <a:solidFill>
-                  <a:srgbClr val="E9EEFB"/>
+                  <a:srgbClr val="0A0E1A"/>
+                </a:solidFill>
+                <a:latin typeface="Calibri"/>
+              </a:rPr>
+              <a:t>Elige el archivo en </a:t>
+            </a:r>
+            <a:r>
+              <a:rPr sz="1400" b="1" i="0">
+                <a:solidFill>
+                  <a:srgbClr val="0A0E1A"/>
                 </a:solidFill>
                 <a:latin typeface="Consolas"/>
               </a:rPr>
-              <a:t>21    transform.Translate(...);</a:t>
-            </a:r>
-          </a:p>
-          <a:p>
-            <a:pPr algn="l">
-              <a:spcAft>
-                <a:spcPts val="200"/>
-              </a:spcAft>
-            </a:pPr>
+              <a:t>C:\Unity\Kit</a:t>
+            </a:r>
             <a:r>
               <a:rPr sz="1500" b="0" i="0">
                 <a:solidFill>
-                  <a:srgbClr val="E9EEFB"/>
-                </a:solidFill>
-                <a:latin typeface="Consolas"/>
-              </a:rPr>
-              <a:t>22</a:t>
-            </a:r>
-          </a:p>
-          <a:p>
-            <a:pPr algn="l">
-              <a:spcAft>
-                <a:spcPts val="200"/>
-              </a:spcAft>
-            </a:pPr>
+                  <a:srgbClr val="0A0E1A"/>
+                </a:solidFill>
+                <a:latin typeface="Calibri"/>
+              </a:rPr>
+              <a:t> y pulsa </a:t>
+            </a:r>
+            <a:r>
+              <a:rPr sz="1500" b="1" i="0">
+                <a:solidFill>
+                  <a:srgbClr val="0A0E1A"/>
+                </a:solidFill>
+                <a:latin typeface="Calibri"/>
+              </a:rPr>
+              <a:t>Abrir</a:t>
+            </a:r>
             <a:r>
               <a:rPr sz="1500" b="0" i="0">
                 <a:solidFill>
-                  <a:srgbClr val="FFC94D"/>
-                </a:solidFill>
-                <a:latin typeface="Consolas"/>
-              </a:rPr>
-              <a:t>23    float rotationY =</a:t>
-            </a:r>
-          </a:p>
-          <a:p>
-            <a:pPr algn="l">
-              <a:spcAft>
-                <a:spcPts val="200"/>
-              </a:spcAft>
-            </a:pPr>
-            <a:r>
-              <a:rPr sz="1500" b="0" i="0">
-                <a:solidFill>
-                  <a:srgbClr val="E9EEFB"/>
-                </a:solidFill>
-                <a:latin typeface="Consolas"/>
-              </a:rPr>
-              <a:t>24  }</a:t>
-            </a:r>
-          </a:p>
-        </p:txBody>
-      </p:sp>
-      <p:sp>
-        <p:nvSpPr>
-          <p:cNvPr id="11" name="TextBox 10"/>
-          <p:cNvSpPr txBox="1"/>
-          <p:nvPr/>
-        </p:nvSpPr>
-        <p:spPr>
-          <a:xfrm>
-            <a:off x="548640" y="4846320"/>
-            <a:ext cx="5760720" cy="1371600"/>
-          </a:xfrm>
-          <a:prstGeom prst="rect">
-            <a:avLst/>
-          </a:prstGeom>
-          <a:noFill/>
-        </p:spPr>
-        <p:txBody>
-          <a:bodyPr wrap="square" lIns="0" rIns="0" tIns="0" bIns="0" anchor="t">
-            <a:spAutoFit/>
-          </a:bodyPr>
-          <a:lstStyle/>
-          <a:p>
-            <a:pPr algn="l">
-              <a:spcAft>
-                <a:spcPts val="600"/>
-              </a:spcAft>
-            </a:pPr>
-            <a:r>
-              <a:rPr sz="1500" b="1" i="0">
-                <a:solidFill>
                   <a:srgbClr val="0A0E1A"/>
                 </a:solidFill>
                 <a:latin typeface="Calibri"/>
               </a:rPr>
-              <a:t>Caso real de agosto: </a:t>
-            </a:r>
-            <a:r>
-              <a:rPr sz="1500" b="0" i="0">
-                <a:solidFill>
-                  <a:srgbClr val="0A0E1A"/>
-                </a:solidFill>
-                <a:latin typeface="Calibri"/>
-              </a:rPr>
-              <a:t>la línea 23 quedó a medias. Le falta el valor y el punto y coma.</a:t>
-            </a:r>
-          </a:p>
-          <a:p>
-            <a:pPr algn="l">
-              <a:spcAft>
-                <a:spcPts val="600"/>
-              </a:spcAft>
-            </a:pPr>
-            <a:r>
-              <a:rPr sz="1500" b="0" i="0">
-                <a:solidFill>
-                  <a:srgbClr val="0A0E1A"/>
-                </a:solidFill>
-                <a:latin typeface="Calibri"/>
-              </a:rPr>
-              <a:t>Un error en un solo archivo apaga todos los demás.</a:t>
-            </a:r>
-          </a:p>
-        </p:txBody>
-      </p:sp>
-      <p:sp>
-        <p:nvSpPr>
-          <p:cNvPr id="12" name="Rounded Rectangle 11"/>
+              <a:t>.</a:t>
+            </a:r>
+          </a:p>
+        </p:txBody>
+      </p:sp>
+      <p:sp>
+        <p:nvSpPr>
+          <p:cNvPr id="8" name="Oval 7"/>
           <p:cNvSpPr/>
           <p:nvPr/>
         </p:nvSpPr>
         <p:spPr>
           <a:xfrm>
-            <a:off x="6675120" y="2880360"/>
-            <a:ext cx="4983480" cy="3383280"/>
-          </a:xfrm>
-          <a:prstGeom prst="roundRect">
-            <a:avLst>
-              <a:gd name="adj" fmla="val 6000"/>
-            </a:avLst>
+            <a:off x="548640" y="3108960"/>
+            <a:ext cx="347472" cy="347472"/>
+          </a:xfrm>
+          <a:prstGeom prst="ellipse">
+            <a:avLst/>
           </a:prstGeom>
           <a:solidFill>
-            <a:srgbClr val="FFFFFF"/>
+            <a:srgbClr val="7317C9"/>
           </a:solidFill>
-          <a:ln w="12700">
-            <a:solidFill>
-              <a:srgbClr val="D2DAE9"/>
-            </a:solidFill>
+          <a:ln>
+            <a:noFill/>
           </a:ln>
           <a:effectLst/>
         </p:spPr>
@@ -12211,21 +13454,32 @@
           </a:fontRef>
         </p:style>
         <p:txBody>
-          <a:bodyPr rtlCol="0" anchor="ctr"/>
-          <a:lstStyle/>
-          <a:p/>
-        </p:txBody>
-      </p:sp>
-      <p:sp>
-        <p:nvSpPr>
-          <p:cNvPr id="13" name="TextBox 12"/>
+          <a:bodyPr rtlCol="0" anchor="ctr" lIns="0" rIns="0" tIns="0" bIns="0"/>
+          <a:lstStyle/>
+          <a:p>
+            <a:pPr algn="ctr"/>
+            <a:r>
+              <a:rPr sz="1300" b="1">
+                <a:solidFill>
+                  <a:srgbClr val="FFFFFF"/>
+                </a:solidFill>
+                <a:latin typeface="Calibri"/>
+              </a:rPr>
+              <a:t>3</a:t>
+            </a:r>
+          </a:p>
+        </p:txBody>
+      </p:sp>
+      <p:sp>
+        <p:nvSpPr>
+          <p:cNvPr id="9" name="TextBox 8"/>
           <p:cNvSpPr txBox="1"/>
           <p:nvPr/>
         </p:nvSpPr>
         <p:spPr>
           <a:xfrm>
-            <a:off x="6949440" y="3035808"/>
-            <a:ext cx="4572000" cy="365760"/>
+            <a:off x="1051560" y="3127248"/>
+            <a:ext cx="5349240" cy="502920"/>
           </a:xfrm>
           <a:prstGeom prst="rect">
             <a:avLst/>
@@ -12244,27 +13498,116 @@
               </a:spcAft>
             </a:pPr>
             <a:r>
-              <a:rPr sz="1700" b="1" i="0">
+              <a:rPr sz="1500" b="0" i="0">
                 <a:solidFill>
                   <a:srgbClr val="0A0E1A"/>
                 </a:solidFill>
                 <a:latin typeface="Calibri"/>
               </a:rPr>
-              <a:t>Los cuatro más comunes</a:t>
-            </a:r>
-          </a:p>
-        </p:txBody>
-      </p:sp>
-      <p:sp>
-        <p:nvSpPr>
-          <p:cNvPr id="14" name="TextBox 13"/>
+              <a:t>En la ventana </a:t>
+            </a:r>
+            <a:r>
+              <a:rPr sz="1500" b="1" i="0">
+                <a:solidFill>
+                  <a:srgbClr val="0A0E1A"/>
+                </a:solidFill>
+                <a:latin typeface="Calibri"/>
+              </a:rPr>
+              <a:t>Import Unity Package</a:t>
+            </a:r>
+            <a:r>
+              <a:rPr sz="1500" b="0" i="0">
+                <a:solidFill>
+                  <a:srgbClr val="0A0E1A"/>
+                </a:solidFill>
+                <a:latin typeface="Calibri"/>
+              </a:rPr>
+              <a:t> deja todo marcado y pulsa </a:t>
+            </a:r>
+            <a:r>
+              <a:rPr sz="1500" b="1" i="0">
+                <a:solidFill>
+                  <a:srgbClr val="0A0E1A"/>
+                </a:solidFill>
+                <a:latin typeface="Calibri"/>
+              </a:rPr>
+              <a:t>Import</a:t>
+            </a:r>
+            <a:r>
+              <a:rPr sz="1500" b="0" i="0">
+                <a:solidFill>
+                  <a:srgbClr val="0A0E1A"/>
+                </a:solidFill>
+                <a:latin typeface="Calibri"/>
+              </a:rPr>
+              <a:t>.</a:t>
+            </a:r>
+          </a:p>
+        </p:txBody>
+      </p:sp>
+      <p:sp>
+        <p:nvSpPr>
+          <p:cNvPr id="10" name="Oval 9"/>
+          <p:cNvSpPr/>
+          <p:nvPr/>
+        </p:nvSpPr>
+        <p:spPr>
+          <a:xfrm>
+            <a:off x="548640" y="3840480"/>
+            <a:ext cx="347472" cy="347472"/>
+          </a:xfrm>
+          <a:prstGeom prst="ellipse">
+            <a:avLst/>
+          </a:prstGeom>
+          <a:solidFill>
+            <a:srgbClr val="7317C9"/>
+          </a:solidFill>
+          <a:ln>
+            <a:noFill/>
+          </a:ln>
+          <a:effectLst/>
+        </p:spPr>
+        <p:style>
+          <a:lnRef idx="1">
+            <a:schemeClr val="accent1"/>
+          </a:lnRef>
+          <a:fillRef idx="3">
+            <a:schemeClr val="accent1"/>
+          </a:fillRef>
+          <a:effectRef idx="2">
+            <a:schemeClr val="accent1"/>
+          </a:effectRef>
+          <a:fontRef idx="minor">
+            <a:schemeClr val="lt1"/>
+          </a:fontRef>
+        </p:style>
+        <p:txBody>
+          <a:bodyPr rtlCol="0" anchor="ctr" lIns="0" rIns="0" tIns="0" bIns="0"/>
+          <a:lstStyle/>
+          <a:p>
+            <a:pPr algn="ctr"/>
+            <a:r>
+              <a:rPr sz="1300" b="1">
+                <a:solidFill>
+                  <a:srgbClr val="FFFFFF"/>
+                </a:solidFill>
+                <a:latin typeface="Calibri"/>
+              </a:rPr>
+              <a:t>4</a:t>
+            </a:r>
+          </a:p>
+        </p:txBody>
+      </p:sp>
+      <p:sp>
+        <p:nvSpPr>
+          <p:cNvPr id="11" name="TextBox 10"/>
           <p:cNvSpPr txBox="1"/>
           <p:nvPr/>
         </p:nvSpPr>
         <p:spPr>
           <a:xfrm>
-            <a:off x="6949440" y="3520440"/>
-            <a:ext cx="4526280" cy="658368"/>
+            <a:off x="1051560" y="3858768"/>
+            <a:ext cx="5349240" cy="502920"/>
           </a:xfrm>
           <a:prstGeom prst="rect">
             <a:avLst/>
@@ -12279,47 +13622,84 @@
           <a:p>
             <a:pPr algn="l">
               <a:spcAft>
-                <a:spcPts val="100"/>
-              </a:spcAft>
-            </a:pPr>
-            <a:r>
-              <a:rPr sz="1300" b="1" i="0">
+                <a:spcPts val="600"/>
+              </a:spcAft>
+            </a:pPr>
+            <a:r>
+              <a:rPr sz="1500" b="0" i="0">
                 <a:solidFill>
                   <a:srgbClr val="0A0E1A"/>
                 </a:solidFill>
-                <a:latin typeface="Consolas"/>
-              </a:rPr>
-              <a:t>; expected</a:t>
-            </a:r>
-          </a:p>
-          <a:p>
-            <a:pPr algn="l">
-              <a:spcAft>
-                <a:spcPts val="100"/>
-              </a:spcAft>
-            </a:pPr>
-            <a:r>
-              <a:rPr sz="1300" b="0" i="0">
-                <a:solidFill>
-                  <a:srgbClr val="4F5C75"/>
-                </a:solidFill>
-                <a:latin typeface="Calibri"/>
-              </a:rPr>
-              <a:t>falta un punto y coma al final de la línea.</a:t>
-            </a:r>
-          </a:p>
-        </p:txBody>
-      </p:sp>
-      <p:sp>
-        <p:nvSpPr>
-          <p:cNvPr id="15" name="TextBox 14"/>
+                <a:latin typeface="Calibri"/>
+              </a:rPr>
+              <a:t>Espera: abajo a la derecha, un círculo gira mientras Unity importa y compila. Cuando para, terminó.</a:t>
+            </a:r>
+          </a:p>
+        </p:txBody>
+      </p:sp>
+      <p:sp>
+        <p:nvSpPr>
+          <p:cNvPr id="12" name="Oval 11"/>
+          <p:cNvSpPr/>
+          <p:nvPr/>
+        </p:nvSpPr>
+        <p:spPr>
+          <a:xfrm>
+            <a:off x="548640" y="4572000"/>
+            <a:ext cx="347472" cy="347472"/>
+          </a:xfrm>
+          <a:prstGeom prst="ellipse">
+            <a:avLst/>
+          </a:prstGeom>
+          <a:solidFill>
+            <a:srgbClr val="7317C9"/>
+          </a:solidFill>
+          <a:ln>
+            <a:noFill/>
+          </a:ln>
+          <a:effectLst/>
+        </p:spPr>
+        <p:style>
+          <a:lnRef idx="1">
+            <a:schemeClr val="accent1"/>
+          </a:lnRef>
+          <a:fillRef idx="3">
+            <a:schemeClr val="accent1"/>
+          </a:fillRef>
+          <a:effectRef idx="2">
+            <a:schemeClr val="accent1"/>
+          </a:effectRef>
+          <a:fontRef idx="minor">
+            <a:schemeClr val="lt1"/>
+          </a:fontRef>
+        </p:style>
+        <p:txBody>
+          <a:bodyPr rtlCol="0" anchor="ctr" lIns="0" rIns="0" tIns="0" bIns="0"/>
+          <a:lstStyle/>
+          <a:p>
+            <a:pPr algn="ctr"/>
+            <a:r>
+              <a:rPr sz="1300" b="1">
+                <a:solidFill>
+                  <a:srgbClr val="FFFFFF"/>
+                </a:solidFill>
+                <a:latin typeface="Calibri"/>
+              </a:rPr>
+              <a:t>5</a:t>
+            </a:r>
+          </a:p>
+        </p:txBody>
+      </p:sp>
+      <p:sp>
+        <p:nvSpPr>
+          <p:cNvPr id="13" name="TextBox 12"/>
           <p:cNvSpPr txBox="1"/>
           <p:nvPr/>
         </p:nvSpPr>
         <p:spPr>
           <a:xfrm>
-            <a:off x="6949440" y="4197096"/>
-            <a:ext cx="4526280" cy="658368"/>
+            <a:off x="1051560" y="4590288"/>
+            <a:ext cx="5349240" cy="502920"/>
           </a:xfrm>
           <a:prstGeom prst="rect">
             <a:avLst/>
@@ -12334,35 +13714,125 @@
           <a:p>
             <a:pPr algn="l">
               <a:spcAft>
-                <a:spcPts val="100"/>
-              </a:spcAft>
-            </a:pPr>
-            <a:r>
-              <a:rPr sz="1300" b="1" i="0">
+                <a:spcPts val="600"/>
+              </a:spcAft>
+            </a:pPr>
+            <a:r>
+              <a:rPr sz="1500" b="0" i="0">
                 <a:solidFill>
                   <a:srgbClr val="0A0E1A"/>
                 </a:solidFill>
-                <a:latin typeface="Consolas"/>
-              </a:rPr>
-              <a:t>The name '...' does not exist</a:t>
-            </a:r>
-          </a:p>
-          <a:p>
-            <a:pPr algn="l">
-              <a:spcAft>
-                <a:spcPts val="100"/>
-              </a:spcAft>
-            </a:pPr>
-            <a:r>
-              <a:rPr sz="1300" b="0" i="0">
-                <a:solidFill>
-                  <a:srgbClr val="4F5C75"/>
-                </a:solidFill>
-                <a:latin typeface="Calibri"/>
-              </a:rPr>
-              <a:t>un nombre mal escrito. C# distingue Mayúsculas.</a:t>
-            </a:r>
-          </a:p>
+                <a:latin typeface="Calibri"/>
+              </a:rPr>
+              <a:t>En Project debe aparecer la carpeta </a:t>
+            </a:r>
+            <a:r>
+              <a:rPr sz="1500" b="1" i="0">
+                <a:solidFill>
+                  <a:srgbClr val="0A0E1A"/>
+                </a:solidFill>
+                <a:latin typeface="Calibri"/>
+              </a:rPr>
+              <a:t>KitEquipo10</a:t>
+            </a:r>
+            <a:r>
+              <a:rPr sz="1500" b="0" i="0">
+                <a:solidFill>
+                  <a:srgbClr val="0A0E1A"/>
+                </a:solidFill>
+                <a:latin typeface="Calibri"/>
+              </a:rPr>
+              <a:t> dentro de Assets.</a:t>
+            </a:r>
+          </a:p>
+        </p:txBody>
+      </p:sp>
+      <p:sp>
+        <p:nvSpPr>
+          <p:cNvPr id="14" name="Rounded Rectangle 13"/>
+          <p:cNvSpPr/>
+          <p:nvPr/>
+        </p:nvSpPr>
+        <p:spPr>
+          <a:xfrm>
+            <a:off x="6766560" y="1645920"/>
+            <a:ext cx="4892040" cy="2880360"/>
+          </a:xfrm>
+          <a:prstGeom prst="roundRect">
+            <a:avLst>
+              <a:gd name="adj" fmla="val 2000"/>
+            </a:avLst>
+          </a:prstGeom>
+          <a:solidFill>
+            <a:srgbClr val="3C3C3C"/>
+          </a:solidFill>
+          <a:ln>
+            <a:noFill/>
+          </a:ln>
+          <a:effectLst/>
+        </p:spPr>
+        <p:style>
+          <a:lnRef idx="1">
+            <a:schemeClr val="accent1"/>
+          </a:lnRef>
+          <a:fillRef idx="3">
+            <a:schemeClr val="accent1"/>
+          </a:fillRef>
+          <a:effectRef idx="2">
+            <a:schemeClr val="accent1"/>
+          </a:effectRef>
+          <a:fontRef idx="minor">
+            <a:schemeClr val="lt1"/>
+          </a:fontRef>
+        </p:style>
+        <p:txBody>
+          <a:bodyPr rtlCol="0" anchor="ctr"/>
+          <a:lstStyle/>
+          <a:p/>
+        </p:txBody>
+      </p:sp>
+      <p:sp>
+        <p:nvSpPr>
+          <p:cNvPr id="15" name="Rounded Rectangle 14"/>
+          <p:cNvSpPr/>
+          <p:nvPr/>
+        </p:nvSpPr>
+        <p:spPr>
+          <a:xfrm>
+            <a:off x="6766560" y="1645920"/>
+            <a:ext cx="4892040" cy="347472"/>
+          </a:xfrm>
+          <a:prstGeom prst="roundRect">
+            <a:avLst>
+              <a:gd name="adj" fmla="val 2000"/>
+            </a:avLst>
+          </a:prstGeom>
+          <a:solidFill>
+            <a:srgbClr val="2A2A2A"/>
+          </a:solidFill>
+          <a:ln>
+            <a:noFill/>
+          </a:ln>
+          <a:effectLst/>
+        </p:spPr>
+        <p:style>
+          <a:lnRef idx="1">
+            <a:schemeClr val="accent1"/>
+          </a:lnRef>
+          <a:fillRef idx="3">
+            <a:schemeClr val="accent1"/>
+          </a:fillRef>
+          <a:effectRef idx="2">
+            <a:schemeClr val="accent1"/>
+          </a:effectRef>
+          <a:fontRef idx="minor">
+            <a:schemeClr val="lt1"/>
+          </a:fontRef>
+        </p:style>
+        <p:txBody>
+          <a:bodyPr rtlCol="0" anchor="ctr"/>
+          <a:lstStyle/>
+          <a:p/>
         </p:txBody>
       </p:sp>
       <p:sp>
@@ -12373,8 +13843,8 @@
         </p:nvSpPr>
         <p:spPr>
           <a:xfrm>
-            <a:off x="6949440" y="4873752"/>
-            <a:ext cx="4526280" cy="658368"/>
+            <a:off x="6903720" y="1719072"/>
+            <a:ext cx="4114800" cy="274320"/>
           </a:xfrm>
           <a:prstGeom prst="rect">
             <a:avLst/>
@@ -12389,47 +13859,77 @@
           <a:p>
             <a:pPr algn="l">
               <a:spcAft>
-                <a:spcPts val="100"/>
-              </a:spcAft>
-            </a:pPr>
-            <a:r>
-              <a:rPr sz="1300" b="1" i="0">
-                <a:solidFill>
-                  <a:srgbClr val="0A0E1A"/>
-                </a:solidFill>
-                <a:latin typeface="Consolas"/>
-              </a:rPr>
-              <a:t>The type 'Text' could not be found</a:t>
-            </a:r>
-          </a:p>
-          <a:p>
-            <a:pPr algn="l">
-              <a:spcAft>
-                <a:spcPts val="100"/>
-              </a:spcAft>
-            </a:pPr>
-            <a:r>
-              <a:rPr sz="1300" b="0" i="0">
-                <a:solidFill>
-                  <a:srgbClr val="4F5C75"/>
-                </a:solidFill>
-                <a:latin typeface="Calibri"/>
-              </a:rPr>
-              <a:t>falta using UnityEngine.UI; arriba.</a:t>
-            </a:r>
-          </a:p>
-        </p:txBody>
-      </p:sp>
-      <p:sp>
-        <p:nvSpPr>
-          <p:cNvPr id="17" name="TextBox 16"/>
+                <a:spcPts val="600"/>
+              </a:spcAft>
+            </a:pPr>
+            <a:r>
+              <a:rPr sz="1200" b="0" i="0">
+                <a:solidFill>
+                  <a:srgbClr val="DDDDDD"/>
+                </a:solidFill>
+                <a:latin typeface="Calibri"/>
+              </a:rPr>
+              <a:t>Import Unity Package</a:t>
+            </a:r>
+          </a:p>
+        </p:txBody>
+      </p:sp>
+      <p:sp>
+        <p:nvSpPr>
+          <p:cNvPr id="17" name="Rounded Rectangle 16"/>
+          <p:cNvSpPr/>
+          <p:nvPr/>
+        </p:nvSpPr>
+        <p:spPr>
+          <a:xfrm>
+            <a:off x="6903720" y="2103120"/>
+            <a:ext cx="4617720" cy="1737360"/>
+          </a:xfrm>
+          <a:prstGeom prst="roundRect">
+            <a:avLst>
+              <a:gd name="adj" fmla="val 2000"/>
+            </a:avLst>
+          </a:prstGeom>
+          <a:solidFill>
+            <a:srgbClr val="4A4A4A"/>
+          </a:solidFill>
+          <a:ln w="12700">
+            <a:solidFill>
+              <a:srgbClr val="2A2A2A"/>
+            </a:solidFill>
+          </a:ln>
+          <a:effectLst/>
+        </p:spPr>
+        <p:style>
+          <a:lnRef idx="1">
+            <a:schemeClr val="accent1"/>
+          </a:lnRef>
+          <a:fillRef idx="3">
+            <a:schemeClr val="accent1"/>
+          </a:fillRef>
+          <a:effectRef idx="2">
+            <a:schemeClr val="accent1"/>
+          </a:effectRef>
+          <a:fontRef idx="minor">
+            <a:schemeClr val="lt1"/>
+          </a:fontRef>
+        </p:style>
+        <p:txBody>
+          <a:bodyPr rtlCol="0" anchor="ctr"/>
+          <a:lstStyle/>
+          <a:p/>
+        </p:txBody>
+      </p:sp>
+      <p:sp>
+        <p:nvSpPr>
+          <p:cNvPr id="18" name="TextBox 17"/>
           <p:cNvSpPr txBox="1"/>
           <p:nvPr/>
         </p:nvSpPr>
         <p:spPr>
           <a:xfrm>
-            <a:off x="6949440" y="5550408"/>
-            <a:ext cx="4526280" cy="658368"/>
+            <a:off x="7040880" y="2194560"/>
+            <a:ext cx="4206240" cy="274320"/>
           </a:xfrm>
           <a:prstGeom prst="rect">
             <a:avLst/>
@@ -12444,47 +13944,40 @@
           <a:p>
             <a:pPr algn="l">
               <a:spcAft>
-                <a:spcPts val="100"/>
-              </a:spcAft>
-            </a:pPr>
-            <a:r>
-              <a:rPr sz="1300" b="1" i="0">
-                <a:solidFill>
-                  <a:srgbClr val="0A0E1A"/>
-                </a:solidFill>
-                <a:latin typeface="Consolas"/>
-              </a:rPr>
-              <a:t>script class cannot be found</a:t>
-            </a:r>
-          </a:p>
-          <a:p>
-            <a:pPr algn="l">
-              <a:spcAft>
-                <a:spcPts val="100"/>
+                <a:spcPts val="600"/>
               </a:spcAft>
             </a:pPr>
             <a:r>
               <a:rPr sz="1300" b="0" i="0">
                 <a:solidFill>
-                  <a:srgbClr val="4F5C75"/>
-                </a:solidFill>
-                <a:latin typeface="Calibri"/>
-              </a:rPr>
-              <a:t>el archivo y la clase no se llaman igual.</a:t>
-            </a:r>
-          </a:p>
-        </p:txBody>
-      </p:sp>
-      <p:sp>
-        <p:nvSpPr>
-          <p:cNvPr id="18" name="Pie"/>
+                  <a:srgbClr val="7DB7FF"/>
+                </a:solidFill>
+                <a:latin typeface="Calibri"/>
+              </a:rPr>
+              <a:t>☑  </a:t>
+            </a:r>
+            <a:r>
+              <a:rPr sz="1300" b="0" i="0">
+                <a:solidFill>
+                  <a:srgbClr val="EEEEEE"/>
+                </a:solidFill>
+                <a:latin typeface="Calibri"/>
+              </a:rPr>
+              <a:t>KitEquipo10</a:t>
+            </a:r>
+          </a:p>
+        </p:txBody>
+      </p:sp>
+      <p:sp>
+        <p:nvSpPr>
+          <p:cNvPr id="19" name="TextBox 18"/>
           <p:cNvSpPr txBox="1"/>
           <p:nvPr/>
         </p:nvSpPr>
         <p:spPr>
           <a:xfrm>
-            <a:off x="548640" y="6400800"/>
-            <a:ext cx="11064240" cy="274320"/>
+            <a:off x="7040880" y="2505456"/>
+            <a:ext cx="4206240" cy="274320"/>
           </a:xfrm>
           <a:prstGeom prst="rect">
             <a:avLst/>
@@ -12497,6 +13990,767 @@
           </a:bodyPr>
           <a:lstStyle/>
           <a:p>
+            <a:pPr algn="l">
+              <a:spcAft>
+                <a:spcPts val="600"/>
+              </a:spcAft>
+            </a:pPr>
+            <a:r>
+              <a:rPr sz="1300" b="0" i="0">
+                <a:solidFill>
+                  <a:srgbClr val="7DB7FF"/>
+                </a:solidFill>
+                <a:latin typeface="Calibri"/>
+              </a:rPr>
+              <a:t>☑  </a:t>
+            </a:r>
+            <a:r>
+              <a:rPr sz="1300" b="0" i="0">
+                <a:solidFill>
+                  <a:srgbClr val="EEEEEE"/>
+                </a:solidFill>
+                <a:latin typeface="Calibri"/>
+              </a:rPr>
+              <a:t>     Comun</a:t>
+            </a:r>
+          </a:p>
+        </p:txBody>
+      </p:sp>
+      <p:sp>
+        <p:nvSpPr>
+          <p:cNvPr id="20" name="TextBox 19"/>
+          <p:cNvSpPr txBox="1"/>
+          <p:nvPr/>
+        </p:nvSpPr>
+        <p:spPr>
+          <a:xfrm>
+            <a:off x="7040880" y="2816352"/>
+            <a:ext cx="4206240" cy="274320"/>
+          </a:xfrm>
+          <a:prstGeom prst="rect">
+            <a:avLst/>
+          </a:prstGeom>
+          <a:noFill/>
+        </p:spPr>
+        <p:txBody>
+          <a:bodyPr wrap="square" lIns="0" rIns="0" tIns="0" bIns="0" anchor="t">
+            <a:spAutoFit/>
+          </a:bodyPr>
+          <a:lstStyle/>
+          <a:p>
+            <a:pPr algn="l">
+              <a:spcAft>
+                <a:spcPts val="600"/>
+              </a:spcAft>
+            </a:pPr>
+            <a:r>
+              <a:rPr sz="1300" b="0" i="0">
+                <a:solidFill>
+                  <a:srgbClr val="7DB7FF"/>
+                </a:solidFill>
+                <a:latin typeface="Calibri"/>
+              </a:rPr>
+              <a:t>☑  </a:t>
+            </a:r>
+            <a:r>
+              <a:rPr sz="1300" b="0" i="0">
+                <a:solidFill>
+                  <a:srgbClr val="EEEEEE"/>
+                </a:solidFill>
+                <a:latin typeface="Calibri"/>
+              </a:rPr>
+              <a:t>     Escenas</a:t>
+            </a:r>
+          </a:p>
+        </p:txBody>
+      </p:sp>
+      <p:sp>
+        <p:nvSpPr>
+          <p:cNvPr id="21" name="TextBox 20"/>
+          <p:cNvSpPr txBox="1"/>
+          <p:nvPr/>
+        </p:nvSpPr>
+        <p:spPr>
+          <a:xfrm>
+            <a:off x="7040880" y="3127248"/>
+            <a:ext cx="4206240" cy="274320"/>
+          </a:xfrm>
+          <a:prstGeom prst="rect">
+            <a:avLst/>
+          </a:prstGeom>
+          <a:noFill/>
+        </p:spPr>
+        <p:txBody>
+          <a:bodyPr wrap="square" lIns="0" rIns="0" tIns="0" bIns="0" anchor="t">
+            <a:spAutoFit/>
+          </a:bodyPr>
+          <a:lstStyle/>
+          <a:p>
+            <a:pPr algn="l">
+              <a:spcAft>
+                <a:spcPts val="600"/>
+              </a:spcAft>
+            </a:pPr>
+            <a:r>
+              <a:rPr sz="1300" b="0" i="0">
+                <a:solidFill>
+                  <a:srgbClr val="7DB7FF"/>
+                </a:solidFill>
+                <a:latin typeface="Calibri"/>
+              </a:rPr>
+              <a:t>☑  </a:t>
+            </a:r>
+            <a:r>
+              <a:rPr sz="1300" b="0" i="0">
+                <a:solidFill>
+                  <a:srgbClr val="EEEEEE"/>
+                </a:solidFill>
+                <a:latin typeface="Calibri"/>
+              </a:rPr>
+              <a:t>     Fino</a:t>
+            </a:r>
+          </a:p>
+        </p:txBody>
+      </p:sp>
+      <p:sp>
+        <p:nvSpPr>
+          <p:cNvPr id="22" name="TextBox 21"/>
+          <p:cNvSpPr txBox="1"/>
+          <p:nvPr/>
+        </p:nvSpPr>
+        <p:spPr>
+          <a:xfrm>
+            <a:off x="7040880" y="3438144"/>
+            <a:ext cx="4206240" cy="274320"/>
+          </a:xfrm>
+          <a:prstGeom prst="rect">
+            <a:avLst/>
+          </a:prstGeom>
+          <a:noFill/>
+        </p:spPr>
+        <p:txBody>
+          <a:bodyPr wrap="square" lIns="0" rIns="0" tIns="0" bIns="0" anchor="t">
+            <a:spAutoFit/>
+          </a:bodyPr>
+          <a:lstStyle/>
+          <a:p>
+            <a:pPr algn="l">
+              <a:spcAft>
+                <a:spcPts val="600"/>
+              </a:spcAft>
+            </a:pPr>
+            <a:r>
+              <a:rPr sz="1300" b="0" i="0">
+                <a:solidFill>
+                  <a:srgbClr val="7DB7FF"/>
+                </a:solidFill>
+                <a:latin typeface="Calibri"/>
+              </a:rPr>
+              <a:t>☑  </a:t>
+            </a:r>
+            <a:r>
+              <a:rPr sz="1300" b="0" i="0">
+                <a:solidFill>
+                  <a:srgbClr val="EEEEEE"/>
+                </a:solidFill>
+                <a:latin typeface="Calibri"/>
+              </a:rPr>
+              <a:t>     Grueso</a:t>
+            </a:r>
+          </a:p>
+        </p:txBody>
+      </p:sp>
+      <p:sp>
+        <p:nvSpPr>
+          <p:cNvPr id="23" name="Rounded Rectangle 22"/>
+          <p:cNvSpPr/>
+          <p:nvPr/>
+        </p:nvSpPr>
+        <p:spPr>
+          <a:xfrm>
+            <a:off x="6903720" y="4023360"/>
+            <a:ext cx="640080" cy="365760"/>
+          </a:xfrm>
+          <a:prstGeom prst="roundRect">
+            <a:avLst>
+              <a:gd name="adj" fmla="val 10000"/>
+            </a:avLst>
+          </a:prstGeom>
+          <a:solidFill>
+            <a:srgbClr val="5A5A5A"/>
+          </a:solidFill>
+          <a:ln>
+            <a:noFill/>
+          </a:ln>
+          <a:effectLst/>
+        </p:spPr>
+        <p:style>
+          <a:lnRef idx="1">
+            <a:schemeClr val="accent1"/>
+          </a:lnRef>
+          <a:fillRef idx="3">
+            <a:schemeClr val="accent1"/>
+          </a:fillRef>
+          <a:effectRef idx="2">
+            <a:schemeClr val="accent1"/>
+          </a:effectRef>
+          <a:fontRef idx="minor">
+            <a:schemeClr val="lt1"/>
+          </a:fontRef>
+        </p:style>
+        <p:txBody>
+          <a:bodyPr rtlCol="0" anchor="ctr"/>
+          <a:lstStyle/>
+          <a:p/>
+        </p:txBody>
+      </p:sp>
+      <p:sp>
+        <p:nvSpPr>
+          <p:cNvPr id="24" name="TextBox 23"/>
+          <p:cNvSpPr txBox="1"/>
+          <p:nvPr/>
+        </p:nvSpPr>
+        <p:spPr>
+          <a:xfrm>
+            <a:off x="6903720" y="4087368"/>
+            <a:ext cx="640080" cy="274320"/>
+          </a:xfrm>
+          <a:prstGeom prst="rect">
+            <a:avLst/>
+          </a:prstGeom>
+          <a:noFill/>
+        </p:spPr>
+        <p:txBody>
+          <a:bodyPr wrap="square" lIns="0" rIns="0" tIns="0" bIns="0" anchor="t">
+            <a:spAutoFit/>
+          </a:bodyPr>
+          <a:lstStyle/>
+          <a:p>
+            <a:pPr algn="ctr">
+              <a:spcAft>
+                <a:spcPts val="600"/>
+              </a:spcAft>
+            </a:pPr>
+            <a:r>
+              <a:rPr sz="1200" b="0" i="0">
+                <a:solidFill>
+                  <a:srgbClr val="FFFFFF"/>
+                </a:solidFill>
+                <a:latin typeface="Calibri"/>
+              </a:rPr>
+              <a:t>All</a:t>
+            </a:r>
+          </a:p>
+        </p:txBody>
+      </p:sp>
+      <p:sp>
+        <p:nvSpPr>
+          <p:cNvPr id="25" name="Rounded Rectangle 24"/>
+          <p:cNvSpPr/>
+          <p:nvPr/>
+        </p:nvSpPr>
+        <p:spPr>
+          <a:xfrm>
+            <a:off x="7635240" y="4023360"/>
+            <a:ext cx="822960" cy="365760"/>
+          </a:xfrm>
+          <a:prstGeom prst="roundRect">
+            <a:avLst>
+              <a:gd name="adj" fmla="val 10000"/>
+            </a:avLst>
+          </a:prstGeom>
+          <a:solidFill>
+            <a:srgbClr val="5A5A5A"/>
+          </a:solidFill>
+          <a:ln>
+            <a:noFill/>
+          </a:ln>
+          <a:effectLst/>
+        </p:spPr>
+        <p:style>
+          <a:lnRef idx="1">
+            <a:schemeClr val="accent1"/>
+          </a:lnRef>
+          <a:fillRef idx="3">
+            <a:schemeClr val="accent1"/>
+          </a:fillRef>
+          <a:effectRef idx="2">
+            <a:schemeClr val="accent1"/>
+          </a:effectRef>
+          <a:fontRef idx="minor">
+            <a:schemeClr val="lt1"/>
+          </a:fontRef>
+        </p:style>
+        <p:txBody>
+          <a:bodyPr rtlCol="0" anchor="ctr"/>
+          <a:lstStyle/>
+          <a:p/>
+        </p:txBody>
+      </p:sp>
+      <p:sp>
+        <p:nvSpPr>
+          <p:cNvPr id="26" name="TextBox 25"/>
+          <p:cNvSpPr txBox="1"/>
+          <p:nvPr/>
+        </p:nvSpPr>
+        <p:spPr>
+          <a:xfrm>
+            <a:off x="7635240" y="4087368"/>
+            <a:ext cx="822960" cy="274320"/>
+          </a:xfrm>
+          <a:prstGeom prst="rect">
+            <a:avLst/>
+          </a:prstGeom>
+          <a:noFill/>
+        </p:spPr>
+        <p:txBody>
+          <a:bodyPr wrap="square" lIns="0" rIns="0" tIns="0" bIns="0" anchor="t">
+            <a:spAutoFit/>
+          </a:bodyPr>
+          <a:lstStyle/>
+          <a:p>
+            <a:pPr algn="ctr">
+              <a:spcAft>
+                <a:spcPts val="600"/>
+              </a:spcAft>
+            </a:pPr>
+            <a:r>
+              <a:rPr sz="1200" b="0" i="0">
+                <a:solidFill>
+                  <a:srgbClr val="FFFFFF"/>
+                </a:solidFill>
+                <a:latin typeface="Calibri"/>
+              </a:rPr>
+              <a:t>None</a:t>
+            </a:r>
+          </a:p>
+        </p:txBody>
+      </p:sp>
+      <p:sp>
+        <p:nvSpPr>
+          <p:cNvPr id="27" name="Rounded Rectangle 26"/>
+          <p:cNvSpPr/>
+          <p:nvPr/>
+        </p:nvSpPr>
+        <p:spPr>
+          <a:xfrm>
+            <a:off x="9738360" y="4023360"/>
+            <a:ext cx="822960" cy="365760"/>
+          </a:xfrm>
+          <a:prstGeom prst="roundRect">
+            <a:avLst>
+              <a:gd name="adj" fmla="val 10000"/>
+            </a:avLst>
+          </a:prstGeom>
+          <a:solidFill>
+            <a:srgbClr val="5A5A5A"/>
+          </a:solidFill>
+          <a:ln>
+            <a:noFill/>
+          </a:ln>
+          <a:effectLst/>
+        </p:spPr>
+        <p:style>
+          <a:lnRef idx="1">
+            <a:schemeClr val="accent1"/>
+          </a:lnRef>
+          <a:fillRef idx="3">
+            <a:schemeClr val="accent1"/>
+          </a:fillRef>
+          <a:effectRef idx="2">
+            <a:schemeClr val="accent1"/>
+          </a:effectRef>
+          <a:fontRef idx="minor">
+            <a:schemeClr val="lt1"/>
+          </a:fontRef>
+        </p:style>
+        <p:txBody>
+          <a:bodyPr rtlCol="0" anchor="ctr"/>
+          <a:lstStyle/>
+          <a:p/>
+        </p:txBody>
+      </p:sp>
+      <p:sp>
+        <p:nvSpPr>
+          <p:cNvPr id="28" name="TextBox 27"/>
+          <p:cNvSpPr txBox="1"/>
+          <p:nvPr/>
+        </p:nvSpPr>
+        <p:spPr>
+          <a:xfrm>
+            <a:off x="9738360" y="4087368"/>
+            <a:ext cx="822960" cy="274320"/>
+          </a:xfrm>
+          <a:prstGeom prst="rect">
+            <a:avLst/>
+          </a:prstGeom>
+          <a:noFill/>
+        </p:spPr>
+        <p:txBody>
+          <a:bodyPr wrap="square" lIns="0" rIns="0" tIns="0" bIns="0" anchor="t">
+            <a:spAutoFit/>
+          </a:bodyPr>
+          <a:lstStyle/>
+          <a:p>
+            <a:pPr algn="ctr">
+              <a:spcAft>
+                <a:spcPts val="600"/>
+              </a:spcAft>
+            </a:pPr>
+            <a:r>
+              <a:rPr sz="1200" b="0" i="0">
+                <a:solidFill>
+                  <a:srgbClr val="FFFFFF"/>
+                </a:solidFill>
+                <a:latin typeface="Calibri"/>
+              </a:rPr>
+              <a:t>Cancel</a:t>
+            </a:r>
+          </a:p>
+        </p:txBody>
+      </p:sp>
+      <p:sp>
+        <p:nvSpPr>
+          <p:cNvPr id="29" name="Rounded Rectangle 28"/>
+          <p:cNvSpPr/>
+          <p:nvPr/>
+        </p:nvSpPr>
+        <p:spPr>
+          <a:xfrm>
+            <a:off x="10607040" y="4023360"/>
+            <a:ext cx="822960" cy="365760"/>
+          </a:xfrm>
+          <a:prstGeom prst="roundRect">
+            <a:avLst>
+              <a:gd name="adj" fmla="val 10000"/>
+            </a:avLst>
+          </a:prstGeom>
+          <a:solidFill>
+            <a:srgbClr val="7317C9"/>
+          </a:solidFill>
+          <a:ln>
+            <a:noFill/>
+          </a:ln>
+          <a:effectLst/>
+        </p:spPr>
+        <p:style>
+          <a:lnRef idx="1">
+            <a:schemeClr val="accent1"/>
+          </a:lnRef>
+          <a:fillRef idx="3">
+            <a:schemeClr val="accent1"/>
+          </a:fillRef>
+          <a:effectRef idx="2">
+            <a:schemeClr val="accent1"/>
+          </a:effectRef>
+          <a:fontRef idx="minor">
+            <a:schemeClr val="lt1"/>
+          </a:fontRef>
+        </p:style>
+        <p:txBody>
+          <a:bodyPr rtlCol="0" anchor="ctr"/>
+          <a:lstStyle/>
+          <a:p/>
+        </p:txBody>
+      </p:sp>
+      <p:sp>
+        <p:nvSpPr>
+          <p:cNvPr id="30" name="TextBox 29"/>
+          <p:cNvSpPr txBox="1"/>
+          <p:nvPr/>
+        </p:nvSpPr>
+        <p:spPr>
+          <a:xfrm>
+            <a:off x="10607040" y="4087368"/>
+            <a:ext cx="822960" cy="274320"/>
+          </a:xfrm>
+          <a:prstGeom prst="rect">
+            <a:avLst/>
+          </a:prstGeom>
+          <a:noFill/>
+        </p:spPr>
+        <p:txBody>
+          <a:bodyPr wrap="square" lIns="0" rIns="0" tIns="0" bIns="0" anchor="t">
+            <a:spAutoFit/>
+          </a:bodyPr>
+          <a:lstStyle/>
+          <a:p>
+            <a:pPr algn="ctr">
+              <a:spcAft>
+                <a:spcPts val="600"/>
+              </a:spcAft>
+            </a:pPr>
+            <a:r>
+              <a:rPr sz="1200" b="0" i="0">
+                <a:solidFill>
+                  <a:srgbClr val="FFFFFF"/>
+                </a:solidFill>
+                <a:latin typeface="Calibri"/>
+              </a:rPr>
+              <a:t>Import</a:t>
+            </a:r>
+          </a:p>
+        </p:txBody>
+      </p:sp>
+      <p:sp>
+        <p:nvSpPr>
+          <p:cNvPr id="31" name="TextBox 30"/>
+          <p:cNvSpPr txBox="1"/>
+          <p:nvPr/>
+        </p:nvSpPr>
+        <p:spPr>
+          <a:xfrm>
+            <a:off x="6766560" y="4617720"/>
+            <a:ext cx="4892040" cy="457200"/>
+          </a:xfrm>
+          <a:prstGeom prst="rect">
+            <a:avLst/>
+          </a:prstGeom>
+          <a:noFill/>
+        </p:spPr>
+        <p:txBody>
+          <a:bodyPr wrap="square" lIns="0" rIns="0" tIns="0" bIns="0" anchor="t">
+            <a:spAutoFit/>
+          </a:bodyPr>
+          <a:lstStyle/>
+          <a:p>
+            <a:pPr algn="l">
+              <a:spcAft>
+                <a:spcPts val="600"/>
+              </a:spcAft>
+            </a:pPr>
+            <a:r>
+              <a:rPr sz="1100" b="0" i="0">
+                <a:solidFill>
+                  <a:srgbClr val="4F5C75"/>
+                </a:solidFill>
+                <a:latin typeface="Calibri"/>
+              </a:rPr>
+              <a:t>Esquema de la ventana, para 10.1. En 10.2 la lista trae Comun, Escenas y Ritmo. En tu pantalla puede verse algo distinta.</a:t>
+            </a:r>
+          </a:p>
+        </p:txBody>
+      </p:sp>
+      <p:sp>
+        <p:nvSpPr>
+          <p:cNvPr id="32" name="Rounded Rectangle 31"/>
+          <p:cNvSpPr/>
+          <p:nvPr/>
+        </p:nvSpPr>
+        <p:spPr>
+          <a:xfrm>
+            <a:off x="6766560" y="5166360"/>
+            <a:ext cx="4892040" cy="1097280"/>
+          </a:xfrm>
+          <a:prstGeom prst="roundRect">
+            <a:avLst>
+              <a:gd name="adj" fmla="val 8000"/>
+            </a:avLst>
+          </a:prstGeom>
+          <a:solidFill>
+            <a:srgbClr val="FCF1DC"/>
+          </a:solidFill>
+          <a:ln>
+            <a:noFill/>
+          </a:ln>
+          <a:effectLst/>
+        </p:spPr>
+        <p:style>
+          <a:lnRef idx="1">
+            <a:schemeClr val="accent1"/>
+          </a:lnRef>
+          <a:fillRef idx="3">
+            <a:schemeClr val="accent1"/>
+          </a:fillRef>
+          <a:effectRef idx="2">
+            <a:schemeClr val="accent1"/>
+          </a:effectRef>
+          <a:fontRef idx="minor">
+            <a:schemeClr val="lt1"/>
+          </a:fontRef>
+        </p:style>
+        <p:txBody>
+          <a:bodyPr rtlCol="0" anchor="ctr"/>
+          <a:lstStyle/>
+          <a:p/>
+        </p:txBody>
+      </p:sp>
+      <p:sp>
+        <p:nvSpPr>
+          <p:cNvPr id="33" name="TextBox 32"/>
+          <p:cNvSpPr txBox="1"/>
+          <p:nvPr/>
+        </p:nvSpPr>
+        <p:spPr>
+          <a:xfrm>
+            <a:off x="6995160" y="5330952"/>
+            <a:ext cx="4434840" cy="822959"/>
+          </a:xfrm>
+          <a:prstGeom prst="rect">
+            <a:avLst/>
+          </a:prstGeom>
+          <a:noFill/>
+        </p:spPr>
+        <p:txBody>
+          <a:bodyPr wrap="square" lIns="0" rIns="0" tIns="0" bIns="0" anchor="t">
+            <a:spAutoFit/>
+          </a:bodyPr>
+          <a:lstStyle/>
+          <a:p>
+            <a:pPr algn="l">
+              <a:spcAft>
+                <a:spcPts val="400"/>
+              </a:spcAft>
+            </a:pPr>
+            <a:r>
+              <a:rPr sz="1300" b="1" i="0">
+                <a:solidFill>
+                  <a:srgbClr val="875A00"/>
+                </a:solidFill>
+                <a:latin typeface="Calibri"/>
+              </a:rPr>
+              <a:t>!  Si ya habías importado otro kit antes</a:t>
+            </a:r>
+          </a:p>
+          <a:p>
+            <a:pPr algn="l">
+              <a:spcAft>
+                <a:spcPts val="400"/>
+              </a:spcAft>
+            </a:pPr>
+            <a:r>
+              <a:rPr sz="1300" b="0" i="0">
+                <a:solidFill>
+                  <a:srgbClr val="0A0E1A"/>
+                </a:solidFill>
+                <a:latin typeface="Calibri"/>
+              </a:rPr>
+              <a:t>Importa este encima, sin desmarcar nada: reemplaza al anterior.</a:t>
+            </a:r>
+          </a:p>
+        </p:txBody>
+      </p:sp>
+      <p:sp>
+        <p:nvSpPr>
+          <p:cNvPr id="34" name="Rounded Rectangle 33"/>
+          <p:cNvSpPr/>
+          <p:nvPr/>
+        </p:nvSpPr>
+        <p:spPr>
+          <a:xfrm>
+            <a:off x="548640" y="5440680"/>
+            <a:ext cx="5852160" cy="822960"/>
+          </a:xfrm>
+          <a:prstGeom prst="roundRect">
+            <a:avLst>
+              <a:gd name="adj" fmla="val 8000"/>
+            </a:avLst>
+          </a:prstGeom>
+          <a:solidFill>
+            <a:srgbClr val="FBE7E6"/>
+          </a:solidFill>
+          <a:ln>
+            <a:noFill/>
+          </a:ln>
+          <a:effectLst/>
+        </p:spPr>
+        <p:style>
+          <a:lnRef idx="1">
+            <a:schemeClr val="accent1"/>
+          </a:lnRef>
+          <a:fillRef idx="3">
+            <a:schemeClr val="accent1"/>
+          </a:fillRef>
+          <a:effectRef idx="2">
+            <a:schemeClr val="accent1"/>
+          </a:effectRef>
+          <a:fontRef idx="minor">
+            <a:schemeClr val="lt1"/>
+          </a:fontRef>
+        </p:style>
+        <p:txBody>
+          <a:bodyPr rtlCol="0" anchor="ctr"/>
+          <a:lstStyle/>
+          <a:p/>
+        </p:txBody>
+      </p:sp>
+      <p:sp>
+        <p:nvSpPr>
+          <p:cNvPr id="35" name="TextBox 34"/>
+          <p:cNvSpPr txBox="1"/>
+          <p:nvPr/>
+        </p:nvSpPr>
+        <p:spPr>
+          <a:xfrm>
+            <a:off x="777240" y="5605272"/>
+            <a:ext cx="5394960" cy="548640"/>
+          </a:xfrm>
+          <a:prstGeom prst="rect">
+            <a:avLst/>
+          </a:prstGeom>
+          <a:noFill/>
+        </p:spPr>
+        <p:txBody>
+          <a:bodyPr wrap="square" lIns="0" rIns="0" tIns="0" bIns="0" anchor="t">
+            <a:spAutoFit/>
+          </a:bodyPr>
+          <a:lstStyle/>
+          <a:p>
+            <a:pPr algn="l">
+              <a:spcAft>
+                <a:spcPts val="400"/>
+              </a:spcAft>
+            </a:pPr>
+            <a:r>
+              <a:rPr sz="1300" b="1" i="0">
+                <a:solidFill>
+                  <a:srgbClr val="B3261E"/>
+                </a:solidFill>
+                <a:latin typeface="Calibri"/>
+              </a:rPr>
+              <a:t>✗  Si la consola se pone roja al terminar</a:t>
+            </a:r>
+          </a:p>
+          <a:p>
+            <a:pPr algn="l">
+              <a:spcAft>
+                <a:spcPts val="400"/>
+              </a:spcAft>
+            </a:pPr>
+            <a:r>
+              <a:rPr sz="1300" b="0" i="0">
+                <a:solidFill>
+                  <a:srgbClr val="0A0E1A"/>
+                </a:solidFill>
+                <a:latin typeface="Calibri"/>
+              </a:rPr>
+              <a:t>Casi siempre es la versión de Unity. Revisa el paso 2 y la diapositiva 2.</a:t>
+            </a:r>
+          </a:p>
+        </p:txBody>
+      </p:sp>
+      <p:sp>
+        <p:nvSpPr>
+          <p:cNvPr id="36" name="Pie"/>
+          <p:cNvSpPr txBox="1"/>
+          <p:nvPr/>
+        </p:nvSpPr>
+        <p:spPr>
+          <a:xfrm>
+            <a:off x="548640" y="6400800"/>
+            <a:ext cx="11064240" cy="274320"/>
+          </a:xfrm>
+          <a:prstGeom prst="rect">
+            <a:avLst/>
+          </a:prstGeom>
+          <a:noFill/>
+        </p:spPr>
+        <p:txBody>
+          <a:bodyPr wrap="square" lIns="0" rIns="0" tIns="0" bIns="0" anchor="t">
+            <a:spAutoFit/>
+          </a:bodyPr>
+          <a:lstStyle/>
+          <a:p>
             <a:pPr algn="r">
               <a:spcAft>
                 <a:spcPts val="600"/>
@@ -12509,7 +14763,7 @@
                 </a:solidFill>
                 <a:latin typeface="Calibri"/>
               </a:rPr>
-              <a:t>Guía 0 · Preparar Unity  ·  8 de 9</a:t>
+              <a:t>Guía 0 · Preparar Unity  ·  8 de 11</a:t>
             </a:r>
           </a:p>
         </p:txBody>
@@ -12528,7 +14782,7 @@
     <p:bg>
       <p:bgPr>
         <a:solidFill>
-          <a:srgbClr val="070B18"/>
+          <a:srgbClr val="EFF3FA"/>
         </a:solidFill>
         <a:effectLst/>
       </p:bgPr>
@@ -12570,7 +14824,7 @@
             <a:r>
               <a:rPr sz="1200" b="1" i="0">
                 <a:solidFill>
-                  <a:srgbClr val="C59BFF"/>
+                  <a:srgbClr val="7317C9"/>
                 </a:solidFill>
                 <a:latin typeface="Calibri"/>
               </a:rPr>
@@ -12609,273 +14863,31 @@
             <a:r>
               <a:rPr sz="3200" b="1" i="0">
                 <a:solidFill>
-                  <a:srgbClr val="E9EEFB"/>
+                  <a:srgbClr val="0A0E1A"/>
                 </a:solidFill>
                 <a:latin typeface="Cambria"/>
               </a:rPr>
-              <a:t>Antes de salir</a:t>
-            </a:r>
-          </a:p>
-        </p:txBody>
-      </p:sp>
-      <p:sp>
-        <p:nvSpPr>
-          <p:cNvPr id="4" name="TextBox 3"/>
-          <p:cNvSpPr txBox="1"/>
-          <p:nvPr/>
-        </p:nvSpPr>
-        <p:spPr>
-          <a:xfrm>
-            <a:off x="548640" y="1737360"/>
-            <a:ext cx="6949440" cy="548640"/>
-          </a:xfrm>
-          <a:prstGeom prst="rect">
-            <a:avLst/>
-          </a:prstGeom>
-          <a:noFill/>
-        </p:spPr>
-        <p:txBody>
-          <a:bodyPr wrap="square" lIns="0" rIns="0" tIns="0" bIns="0" anchor="t">
-            <a:spAutoFit/>
-          </a:bodyPr>
-          <a:lstStyle/>
-          <a:p>
-            <a:pPr algn="l">
-              <a:spcAft>
-                <a:spcPts val="600"/>
-              </a:spcAft>
-            </a:pPr>
-            <a:r>
-              <a:rPr sz="2000" b="0" i="0">
-                <a:solidFill>
-                  <a:srgbClr val="C59BFF"/>
-                </a:solidFill>
-                <a:latin typeface="Calibri"/>
-              </a:rPr>
-              <a:t>☐   </a:t>
-            </a:r>
-            <a:r>
-              <a:rPr sz="1700" b="0" i="0">
-                <a:solidFill>
-                  <a:srgbClr val="E9EEFB"/>
-                </a:solidFill>
-                <a:latin typeface="Calibri"/>
-              </a:rPr>
-              <a:t>Unity 2019.4.38f1 instalada, con Visual Studio y WebGL.</a:t>
-            </a:r>
-          </a:p>
-        </p:txBody>
-      </p:sp>
-      <p:sp>
-        <p:nvSpPr>
-          <p:cNvPr id="5" name="TextBox 4"/>
-          <p:cNvSpPr txBox="1"/>
-          <p:nvPr/>
-        </p:nvSpPr>
-        <p:spPr>
-          <a:xfrm>
-            <a:off x="548640" y="2395728"/>
-            <a:ext cx="6949440" cy="548640"/>
-          </a:xfrm>
-          <a:prstGeom prst="rect">
-            <a:avLst/>
-          </a:prstGeom>
-          <a:noFill/>
-        </p:spPr>
-        <p:txBody>
-          <a:bodyPr wrap="square" lIns="0" rIns="0" tIns="0" bIns="0" anchor="t">
-            <a:spAutoFit/>
-          </a:bodyPr>
-          <a:lstStyle/>
-          <a:p>
-            <a:pPr algn="l">
-              <a:spcAft>
-                <a:spcPts val="600"/>
-              </a:spcAft>
-            </a:pPr>
-            <a:r>
-              <a:rPr sz="2000" b="0" i="0">
-                <a:solidFill>
-                  <a:srgbClr val="C59BFF"/>
-                </a:solidFill>
-                <a:latin typeface="Calibri"/>
-              </a:rPr>
-              <a:t>☐   </a:t>
-            </a:r>
-            <a:r>
-              <a:rPr sz="1700" b="0" i="0">
-                <a:solidFill>
-                  <a:srgbClr val="E9EEFB"/>
-                </a:solidFill>
-                <a:latin typeface="Calibri"/>
-              </a:rPr>
-              <a:t>El proyecto está en C:\Unity, no en OneDrive ni en el Escritorio.</a:t>
-            </a:r>
-          </a:p>
-        </p:txBody>
-      </p:sp>
-      <p:sp>
-        <p:nvSpPr>
-          <p:cNvPr id="6" name="TextBox 5"/>
-          <p:cNvSpPr txBox="1"/>
-          <p:nvPr/>
-        </p:nvSpPr>
-        <p:spPr>
-          <a:xfrm>
-            <a:off x="548640" y="3054096"/>
-            <a:ext cx="6949440" cy="548640"/>
-          </a:xfrm>
-          <a:prstGeom prst="rect">
-            <a:avLst/>
-          </a:prstGeom>
-          <a:noFill/>
-        </p:spPr>
-        <p:txBody>
-          <a:bodyPr wrap="square" lIns="0" rIns="0" tIns="0" bIns="0" anchor="t">
-            <a:spAutoFit/>
-          </a:bodyPr>
-          <a:lstStyle/>
-          <a:p>
-            <a:pPr algn="l">
-              <a:spcAft>
-                <a:spcPts val="600"/>
-              </a:spcAft>
-            </a:pPr>
-            <a:r>
-              <a:rPr sz="2000" b="0" i="0">
-                <a:solidFill>
-                  <a:srgbClr val="C59BFF"/>
-                </a:solidFill>
-                <a:latin typeface="Calibri"/>
-              </a:rPr>
-              <a:t>☐   </a:t>
-            </a:r>
-            <a:r>
-              <a:rPr sz="1700" b="0" i="0">
-                <a:solidFill>
-                  <a:srgbClr val="E9EEFB"/>
-                </a:solidFill>
-                <a:latin typeface="Calibri"/>
-              </a:rPr>
-              <a:t>Doble clic en un script abre Visual Studio.</a:t>
-            </a:r>
-          </a:p>
-        </p:txBody>
-      </p:sp>
-      <p:sp>
-        <p:nvSpPr>
-          <p:cNvPr id="7" name="TextBox 6"/>
-          <p:cNvSpPr txBox="1"/>
-          <p:nvPr/>
-        </p:nvSpPr>
-        <p:spPr>
-          <a:xfrm>
-            <a:off x="548640" y="3712464"/>
-            <a:ext cx="6949440" cy="548640"/>
-          </a:xfrm>
-          <a:prstGeom prst="rect">
-            <a:avLst/>
-          </a:prstGeom>
-          <a:noFill/>
-        </p:spPr>
-        <p:txBody>
-          <a:bodyPr wrap="square" lIns="0" rIns="0" tIns="0" bIns="0" anchor="t">
-            <a:spAutoFit/>
-          </a:bodyPr>
-          <a:lstStyle/>
-          <a:p>
-            <a:pPr algn="l">
-              <a:spcAft>
-                <a:spcPts val="600"/>
-              </a:spcAft>
-            </a:pPr>
-            <a:r>
-              <a:rPr sz="2000" b="0" i="0">
-                <a:solidFill>
-                  <a:srgbClr val="C59BFF"/>
-                </a:solidFill>
-                <a:latin typeface="Calibri"/>
-              </a:rPr>
-              <a:t>☐   </a:t>
-            </a:r>
-            <a:r>
-              <a:rPr sz="1700" b="0" i="0">
-                <a:solidFill>
-                  <a:srgbClr val="E9EEFB"/>
-                </a:solidFill>
-                <a:latin typeface="Calibri"/>
-              </a:rPr>
-              <a:t>La escena 00_PruebaDelKit dice Kit listo en verde.</a:t>
-            </a:r>
-          </a:p>
-        </p:txBody>
-      </p:sp>
-      <p:sp>
-        <p:nvSpPr>
-          <p:cNvPr id="8" name="TextBox 7"/>
-          <p:cNvSpPr txBox="1"/>
-          <p:nvPr/>
-        </p:nvSpPr>
-        <p:spPr>
-          <a:xfrm>
-            <a:off x="548640" y="4370831"/>
-            <a:ext cx="6949440" cy="548640"/>
-          </a:xfrm>
-          <a:prstGeom prst="rect">
-            <a:avLst/>
-          </a:prstGeom>
-          <a:noFill/>
-        </p:spPr>
-        <p:txBody>
-          <a:bodyPr wrap="square" lIns="0" rIns="0" tIns="0" bIns="0" anchor="t">
-            <a:spAutoFit/>
-          </a:bodyPr>
-          <a:lstStyle/>
-          <a:p>
-            <a:pPr algn="l">
-              <a:spcAft>
-                <a:spcPts val="600"/>
-              </a:spcAft>
-            </a:pPr>
-            <a:r>
-              <a:rPr sz="2000" b="0" i="0">
-                <a:solidFill>
-                  <a:srgbClr val="C59BFF"/>
-                </a:solidFill>
-                <a:latin typeface="Calibri"/>
-              </a:rPr>
-              <a:t>☐   </a:t>
-            </a:r>
-            <a:r>
-              <a:rPr sz="1700" b="0" i="0">
-                <a:solidFill>
-                  <a:srgbClr val="E9EEFB"/>
-                </a:solidFill>
-                <a:latin typeface="Calibri"/>
-              </a:rPr>
-              <a:t>Captura de esa pantalla subida a la carpeta del equipo: Fase0_listo.png</a:t>
-            </a:r>
-          </a:p>
-        </p:txBody>
-      </p:sp>
-      <p:sp>
-        <p:nvSpPr>
-          <p:cNvPr id="9" name="Rounded Rectangle 8"/>
+              <a:t>Paso 5 (3 de 3) · Probar que quedó bien</a:t>
+            </a:r>
+          </a:p>
+        </p:txBody>
+      </p:sp>
+      <p:sp>
+        <p:nvSpPr>
+          <p:cNvPr id="4" name="Oval 3"/>
           <p:cNvSpPr/>
           <p:nvPr/>
         </p:nvSpPr>
         <p:spPr>
           <a:xfrm>
-            <a:off x="8001000" y="1737360"/>
-            <a:ext cx="3657600" cy="2331720"/>
-          </a:xfrm>
-          <a:prstGeom prst="roundRect">
-            <a:avLst>
-              <a:gd name="adj" fmla="val 5000"/>
-            </a:avLst>
+            <a:off x="548640" y="1645920"/>
+            <a:ext cx="347472" cy="347472"/>
+          </a:xfrm>
+          <a:prstGeom prst="ellipse">
+            <a:avLst/>
           </a:prstGeom>
           <a:solidFill>
-            <a:srgbClr val="141D3D"/>
+            <a:srgbClr val="7317C9"/>
           </a:solidFill>
           <a:ln>
             <a:noFill/>
@@ -12897,21 +14909,32 @@
           </a:fontRef>
         </p:style>
         <p:txBody>
-          <a:bodyPr rtlCol="0" anchor="ctr"/>
-          <a:lstStyle/>
-          <a:p/>
-        </p:txBody>
-      </p:sp>
-      <p:sp>
-        <p:nvSpPr>
-          <p:cNvPr id="10" name="TextBox 9"/>
+          <a:bodyPr rtlCol="0" anchor="ctr" lIns="0" rIns="0" tIns="0" bIns="0"/>
+          <a:lstStyle/>
+          <a:p>
+            <a:pPr algn="ctr"/>
+            <a:r>
+              <a:rPr sz="1300" b="1">
+                <a:solidFill>
+                  <a:srgbClr val="FFFFFF"/>
+                </a:solidFill>
+                <a:latin typeface="Calibri"/>
+              </a:rPr>
+              <a:t>1</a:t>
+            </a:r>
+          </a:p>
+        </p:txBody>
+      </p:sp>
+      <p:sp>
+        <p:nvSpPr>
+          <p:cNvPr id="5" name="TextBox 4"/>
           <p:cNvSpPr txBox="1"/>
           <p:nvPr/>
         </p:nvSpPr>
         <p:spPr>
           <a:xfrm>
-            <a:off x="8275320" y="1965960"/>
-            <a:ext cx="3154680" cy="2743200"/>
+            <a:off x="1051560" y="1664208"/>
+            <a:ext cx="5532120" cy="502920"/>
           </a:xfrm>
           <a:prstGeom prst="rect">
             <a:avLst/>
@@ -12926,63 +14949,102 @@
           <a:p>
             <a:pPr algn="l">
               <a:spcAft>
-                <a:spcPts val="800"/>
-              </a:spcAft>
-            </a:pPr>
-            <a:r>
-              <a:rPr sz="1300" b="1" i="0">
-                <a:solidFill>
-                  <a:srgbClr val="C59BFF"/>
-                </a:solidFill>
-                <a:latin typeface="Calibri"/>
-              </a:rPr>
-              <a:t>SIGUIENTE GUÍA</a:t>
-            </a:r>
-          </a:p>
-          <a:p>
-            <a:pPr algn="l">
-              <a:spcAft>
-                <a:spcPts val="800"/>
-              </a:spcAft>
-            </a:pPr>
-            <a:r>
-              <a:rPr sz="2600" b="1" i="0">
-                <a:solidFill>
-                  <a:srgbClr val="E9EEFB"/>
-                </a:solidFill>
-                <a:latin typeface="Cambria"/>
-              </a:rPr>
-              <a:t>28 de octubre</a:t>
-            </a:r>
-          </a:p>
-          <a:p>
-            <a:pPr algn="l">
-              <a:spcAft>
-                <a:spcPts val="800"/>
-              </a:spcAft>
-            </a:pPr>
-            <a:r>
-              <a:rPr sz="1500" b="0" i="0">
-                <a:solidFill>
-                  <a:srgbClr val="94A4C6"/>
-                </a:solidFill>
-                <a:latin typeface="Calibri"/>
-              </a:rPr>
-              <a:t>La mecánica central de tu juego: el pincel y la zona en 10.1, las notas al ritmo en 10.2.</a:t>
-            </a:r>
-          </a:p>
-        </p:txBody>
-      </p:sp>
-      <p:sp>
-        <p:nvSpPr>
-          <p:cNvPr id="11" name="Pie"/>
+                <a:spcPts val="600"/>
+              </a:spcAft>
+            </a:pPr>
+            <a:r>
+              <a:rPr sz="1600" b="0" i="0">
+                <a:solidFill>
+                  <a:srgbClr val="0A0E1A"/>
+                </a:solidFill>
+                <a:latin typeface="Calibri"/>
+              </a:rPr>
+              <a:t>En Project abre </a:t>
+            </a:r>
+            <a:r>
+              <a:rPr sz="1600" b="1" i="0">
+                <a:solidFill>
+                  <a:srgbClr val="0A0E1A"/>
+                </a:solidFill>
+                <a:latin typeface="Calibri"/>
+              </a:rPr>
+              <a:t>KitEquipo10 &gt; Escenas</a:t>
+            </a:r>
+            <a:r>
+              <a:rPr sz="1600" b="0" i="0">
+                <a:solidFill>
+                  <a:srgbClr val="0A0E1A"/>
+                </a:solidFill>
+                <a:latin typeface="Calibri"/>
+              </a:rPr>
+              <a:t>.</a:t>
+            </a:r>
+          </a:p>
+        </p:txBody>
+      </p:sp>
+      <p:sp>
+        <p:nvSpPr>
+          <p:cNvPr id="6" name="Oval 5"/>
+          <p:cNvSpPr/>
+          <p:nvPr/>
+        </p:nvSpPr>
+        <p:spPr>
+          <a:xfrm>
+            <a:off x="548640" y="2359152"/>
+            <a:ext cx="347472" cy="347472"/>
+          </a:xfrm>
+          <a:prstGeom prst="ellipse">
+            <a:avLst/>
+          </a:prstGeom>
+          <a:solidFill>
+            <a:srgbClr val="7317C9"/>
+          </a:solidFill>
+          <a:ln>
+            <a:noFill/>
+          </a:ln>
+          <a:effectLst/>
+        </p:spPr>
+        <p:style>
+          <a:lnRef idx="1">
+            <a:schemeClr val="accent1"/>
+          </a:lnRef>
+          <a:fillRef idx="3">
+            <a:schemeClr val="accent1"/>
+          </a:fillRef>
+          <a:effectRef idx="2">
+            <a:schemeClr val="accent1"/>
+          </a:effectRef>
+          <a:fontRef idx="minor">
+            <a:schemeClr val="lt1"/>
+          </a:fontRef>
+        </p:style>
+        <p:txBody>
+          <a:bodyPr rtlCol="0" anchor="ctr" lIns="0" rIns="0" tIns="0" bIns="0"/>
+          <a:lstStyle/>
+          <a:p>
+            <a:pPr algn="ctr"/>
+            <a:r>
+              <a:rPr sz="1300" b="1">
+                <a:solidFill>
+                  <a:srgbClr val="FFFFFF"/>
+                </a:solidFill>
+                <a:latin typeface="Calibri"/>
+              </a:rPr>
+              <a:t>2</a:t>
+            </a:r>
+          </a:p>
+        </p:txBody>
+      </p:sp>
+      <p:sp>
+        <p:nvSpPr>
+          <p:cNvPr id="7" name="TextBox 6"/>
           <p:cNvSpPr txBox="1"/>
           <p:nvPr/>
         </p:nvSpPr>
         <p:spPr>
           <a:xfrm>
-            <a:off x="548640" y="6400800"/>
-            <a:ext cx="11064240" cy="274320"/>
+            <a:off x="1051560" y="2377440"/>
+            <a:ext cx="5532120" cy="502920"/>
           </a:xfrm>
           <a:prstGeom prst="rect">
             <a:avLst/>
@@ -12995,6 +15057,667 @@
           </a:bodyPr>
           <a:lstStyle/>
           <a:p>
+            <a:pPr algn="l">
+              <a:spcAft>
+                <a:spcPts val="600"/>
+              </a:spcAft>
+            </a:pPr>
+            <a:r>
+              <a:rPr sz="1600" b="0" i="0">
+                <a:solidFill>
+                  <a:srgbClr val="0A0E1A"/>
+                </a:solidFill>
+                <a:latin typeface="Calibri"/>
+              </a:rPr>
+              <a:t>Haz doble clic en la escena </a:t>
+            </a:r>
+            <a:r>
+              <a:rPr sz="1600" b="1" i="0">
+                <a:solidFill>
+                  <a:srgbClr val="0A0E1A"/>
+                </a:solidFill>
+                <a:latin typeface="Calibri"/>
+              </a:rPr>
+              <a:t>00_PruebaDelKit</a:t>
+            </a:r>
+            <a:r>
+              <a:rPr sz="1600" b="0" i="0">
+                <a:solidFill>
+                  <a:srgbClr val="0A0E1A"/>
+                </a:solidFill>
+                <a:latin typeface="Calibri"/>
+              </a:rPr>
+              <a:t>.</a:t>
+            </a:r>
+          </a:p>
+        </p:txBody>
+      </p:sp>
+      <p:sp>
+        <p:nvSpPr>
+          <p:cNvPr id="8" name="Oval 7"/>
+          <p:cNvSpPr/>
+          <p:nvPr/>
+        </p:nvSpPr>
+        <p:spPr>
+          <a:xfrm>
+            <a:off x="548640" y="3072384"/>
+            <a:ext cx="347472" cy="347472"/>
+          </a:xfrm>
+          <a:prstGeom prst="ellipse">
+            <a:avLst/>
+          </a:prstGeom>
+          <a:solidFill>
+            <a:srgbClr val="7317C9"/>
+          </a:solidFill>
+          <a:ln>
+            <a:noFill/>
+          </a:ln>
+          <a:effectLst/>
+        </p:spPr>
+        <p:style>
+          <a:lnRef idx="1">
+            <a:schemeClr val="accent1"/>
+          </a:lnRef>
+          <a:fillRef idx="3">
+            <a:schemeClr val="accent1"/>
+          </a:fillRef>
+          <a:effectRef idx="2">
+            <a:schemeClr val="accent1"/>
+          </a:effectRef>
+          <a:fontRef idx="minor">
+            <a:schemeClr val="lt1"/>
+          </a:fontRef>
+        </p:style>
+        <p:txBody>
+          <a:bodyPr rtlCol="0" anchor="ctr" lIns="0" rIns="0" tIns="0" bIns="0"/>
+          <a:lstStyle/>
+          <a:p>
+            <a:pPr algn="ctr"/>
+            <a:r>
+              <a:rPr sz="1300" b="1">
+                <a:solidFill>
+                  <a:srgbClr val="FFFFFF"/>
+                </a:solidFill>
+                <a:latin typeface="Calibri"/>
+              </a:rPr>
+              <a:t>3</a:t>
+            </a:r>
+          </a:p>
+        </p:txBody>
+      </p:sp>
+      <p:sp>
+        <p:nvSpPr>
+          <p:cNvPr id="9" name="TextBox 8"/>
+          <p:cNvSpPr txBox="1"/>
+          <p:nvPr/>
+        </p:nvSpPr>
+        <p:spPr>
+          <a:xfrm>
+            <a:off x="1051560" y="3090672"/>
+            <a:ext cx="5532120" cy="502920"/>
+          </a:xfrm>
+          <a:prstGeom prst="rect">
+            <a:avLst/>
+          </a:prstGeom>
+          <a:noFill/>
+        </p:spPr>
+        <p:txBody>
+          <a:bodyPr wrap="square" lIns="0" rIns="0" tIns="0" bIns="0" anchor="t">
+            <a:spAutoFit/>
+          </a:bodyPr>
+          <a:lstStyle/>
+          <a:p>
+            <a:pPr algn="l">
+              <a:spcAft>
+                <a:spcPts val="600"/>
+              </a:spcAft>
+            </a:pPr>
+            <a:r>
+              <a:rPr sz="1600" b="0" i="0">
+                <a:solidFill>
+                  <a:srgbClr val="0A0E1A"/>
+                </a:solidFill>
+                <a:latin typeface="Calibri"/>
+              </a:rPr>
+              <a:t>Pulsa </a:t>
+            </a:r>
+            <a:r>
+              <a:rPr sz="1600" b="1" i="0">
+                <a:solidFill>
+                  <a:srgbClr val="0A0E1A"/>
+                </a:solidFill>
+                <a:latin typeface="Calibri"/>
+              </a:rPr>
+              <a:t>▶ Play</a:t>
+            </a:r>
+            <a:r>
+              <a:rPr sz="1600" b="0" i="0">
+                <a:solidFill>
+                  <a:srgbClr val="0A0E1A"/>
+                </a:solidFill>
+                <a:latin typeface="Calibri"/>
+              </a:rPr>
+              <a:t> arriba en el centro.</a:t>
+            </a:r>
+          </a:p>
+        </p:txBody>
+      </p:sp>
+      <p:sp>
+        <p:nvSpPr>
+          <p:cNvPr id="10" name="Oval 9"/>
+          <p:cNvSpPr/>
+          <p:nvPr/>
+        </p:nvSpPr>
+        <p:spPr>
+          <a:xfrm>
+            <a:off x="548640" y="3785615"/>
+            <a:ext cx="347472" cy="347472"/>
+          </a:xfrm>
+          <a:prstGeom prst="ellipse">
+            <a:avLst/>
+          </a:prstGeom>
+          <a:solidFill>
+            <a:srgbClr val="7317C9"/>
+          </a:solidFill>
+          <a:ln>
+            <a:noFill/>
+          </a:ln>
+          <a:effectLst/>
+        </p:spPr>
+        <p:style>
+          <a:lnRef idx="1">
+            <a:schemeClr val="accent1"/>
+          </a:lnRef>
+          <a:fillRef idx="3">
+            <a:schemeClr val="accent1"/>
+          </a:fillRef>
+          <a:effectRef idx="2">
+            <a:schemeClr val="accent1"/>
+          </a:effectRef>
+          <a:fontRef idx="minor">
+            <a:schemeClr val="lt1"/>
+          </a:fontRef>
+        </p:style>
+        <p:txBody>
+          <a:bodyPr rtlCol="0" anchor="ctr" lIns="0" rIns="0" tIns="0" bIns="0"/>
+          <a:lstStyle/>
+          <a:p>
+            <a:pPr algn="ctr"/>
+            <a:r>
+              <a:rPr sz="1300" b="1">
+                <a:solidFill>
+                  <a:srgbClr val="FFFFFF"/>
+                </a:solidFill>
+                <a:latin typeface="Calibri"/>
+              </a:rPr>
+              <a:t>4</a:t>
+            </a:r>
+          </a:p>
+        </p:txBody>
+      </p:sp>
+      <p:sp>
+        <p:nvSpPr>
+          <p:cNvPr id="11" name="TextBox 10"/>
+          <p:cNvSpPr txBox="1"/>
+          <p:nvPr/>
+        </p:nvSpPr>
+        <p:spPr>
+          <a:xfrm>
+            <a:off x="1051560" y="3803903"/>
+            <a:ext cx="5532120" cy="502920"/>
+          </a:xfrm>
+          <a:prstGeom prst="rect">
+            <a:avLst/>
+          </a:prstGeom>
+          <a:noFill/>
+        </p:spPr>
+        <p:txBody>
+          <a:bodyPr wrap="square" lIns="0" rIns="0" tIns="0" bIns="0" anchor="t">
+            <a:spAutoFit/>
+          </a:bodyPr>
+          <a:lstStyle/>
+          <a:p>
+            <a:pPr algn="l">
+              <a:spcAft>
+                <a:spcPts val="600"/>
+              </a:spcAft>
+            </a:pPr>
+            <a:r>
+              <a:rPr sz="1600" b="0" i="0">
+                <a:solidFill>
+                  <a:srgbClr val="0A0E1A"/>
+                </a:solidFill>
+                <a:latin typeface="Calibri"/>
+              </a:rPr>
+              <a:t>En la ventana </a:t>
+            </a:r>
+            <a:r>
+              <a:rPr sz="1600" b="1" i="0">
+                <a:solidFill>
+                  <a:srgbClr val="0A0E1A"/>
+                </a:solidFill>
+                <a:latin typeface="Calibri"/>
+              </a:rPr>
+              <a:t>Game</a:t>
+            </a:r>
+            <a:r>
+              <a:rPr sz="1600" b="0" i="0">
+                <a:solidFill>
+                  <a:srgbClr val="0A0E1A"/>
+                </a:solidFill>
+                <a:latin typeface="Calibri"/>
+              </a:rPr>
+              <a:t> debe salir el letrero verde de la derecha.</a:t>
+            </a:r>
+          </a:p>
+        </p:txBody>
+      </p:sp>
+      <p:sp>
+        <p:nvSpPr>
+          <p:cNvPr id="12" name="Rounded Rectangle 11"/>
+          <p:cNvSpPr/>
+          <p:nvPr/>
+        </p:nvSpPr>
+        <p:spPr>
+          <a:xfrm>
+            <a:off x="7040880" y="1645920"/>
+            <a:ext cx="4617720" cy="3017520"/>
+          </a:xfrm>
+          <a:prstGeom prst="roundRect">
+            <a:avLst>
+              <a:gd name="adj" fmla="val 3000"/>
+            </a:avLst>
+          </a:prstGeom>
+          <a:solidFill>
+            <a:srgbClr val="1E1E1E"/>
+          </a:solidFill>
+          <a:ln>
+            <a:noFill/>
+          </a:ln>
+          <a:effectLst/>
+        </p:spPr>
+        <p:style>
+          <a:lnRef idx="1">
+            <a:schemeClr val="accent1"/>
+          </a:lnRef>
+          <a:fillRef idx="3">
+            <a:schemeClr val="accent1"/>
+          </a:fillRef>
+          <a:effectRef idx="2">
+            <a:schemeClr val="accent1"/>
+          </a:effectRef>
+          <a:fontRef idx="minor">
+            <a:schemeClr val="lt1"/>
+          </a:fontRef>
+        </p:style>
+        <p:txBody>
+          <a:bodyPr rtlCol="0" anchor="ctr"/>
+          <a:lstStyle/>
+          <a:p/>
+        </p:txBody>
+      </p:sp>
+      <p:sp>
+        <p:nvSpPr>
+          <p:cNvPr id="13" name="TextBox 12"/>
+          <p:cNvSpPr txBox="1"/>
+          <p:nvPr/>
+        </p:nvSpPr>
+        <p:spPr>
+          <a:xfrm>
+            <a:off x="7223760" y="1737360"/>
+            <a:ext cx="1828800" cy="274320"/>
+          </a:xfrm>
+          <a:prstGeom prst="rect">
+            <a:avLst/>
+          </a:prstGeom>
+          <a:noFill/>
+        </p:spPr>
+        <p:txBody>
+          <a:bodyPr wrap="square" lIns="0" rIns="0" tIns="0" bIns="0" anchor="t">
+            <a:spAutoFit/>
+          </a:bodyPr>
+          <a:lstStyle/>
+          <a:p>
+            <a:pPr algn="l">
+              <a:spcAft>
+                <a:spcPts val="600"/>
+              </a:spcAft>
+            </a:pPr>
+            <a:r>
+              <a:rPr sz="1100" b="0" i="0">
+                <a:solidFill>
+                  <a:srgbClr val="BBBBBB"/>
+                </a:solidFill>
+                <a:latin typeface="Calibri"/>
+              </a:rPr>
+              <a:t>Game</a:t>
+            </a:r>
+          </a:p>
+        </p:txBody>
+      </p:sp>
+      <p:sp>
+        <p:nvSpPr>
+          <p:cNvPr id="14" name="TextBox 13"/>
+          <p:cNvSpPr txBox="1"/>
+          <p:nvPr/>
+        </p:nvSpPr>
+        <p:spPr>
+          <a:xfrm>
+            <a:off x="7223760" y="2240280"/>
+            <a:ext cx="4251960" cy="2194560"/>
+          </a:xfrm>
+          <a:prstGeom prst="rect">
+            <a:avLst/>
+          </a:prstGeom>
+          <a:noFill/>
+        </p:spPr>
+        <p:txBody>
+          <a:bodyPr wrap="square" lIns="0" rIns="0" tIns="0" bIns="0" anchor="t">
+            <a:spAutoFit/>
+          </a:bodyPr>
+          <a:lstStyle/>
+          <a:p>
+            <a:pPr algn="ctr">
+              <a:spcAft>
+                <a:spcPts val="600"/>
+              </a:spcAft>
+            </a:pPr>
+            <a:r>
+              <a:rPr sz="2600" b="1" i="0">
+                <a:solidFill>
+                  <a:srgbClr val="4FE39A"/>
+                </a:solidFill>
+                <a:latin typeface="Calibri"/>
+              </a:rPr>
+              <a:t>Kit listo</a:t>
+            </a:r>
+          </a:p>
+          <a:p>
+            <a:pPr algn="ctr">
+              <a:spcAft>
+                <a:spcPts val="600"/>
+              </a:spcAft>
+            </a:pPr>
+            <a:r>
+              <a:rPr sz="1400" b="0" i="0">
+                <a:solidFill>
+                  <a:srgbClr val="4FE39A"/>
+                </a:solidFill>
+                <a:latin typeface="Calibri"/>
+              </a:rPr>
+              <a:t>Unity 2019.4.38f1  ·  versión correcta</a:t>
+            </a:r>
+          </a:p>
+          <a:p>
+            <a:pPr algn="ctr">
+              <a:spcAft>
+                <a:spcPts val="600"/>
+              </a:spcAft>
+            </a:pPr>
+            <a:r>
+              <a:rPr sz="1400" b="0" i="0">
+                <a:solidFill>
+                  <a:srgbClr val="4FE39A"/>
+                </a:solidFill>
+                <a:latin typeface="Calibri"/>
+              </a:rPr>
+              <a:t>Mano: Derecha  ·  Sensibilidad: x1</a:t>
+            </a:r>
+          </a:p>
+        </p:txBody>
+      </p:sp>
+      <p:sp>
+        <p:nvSpPr>
+          <p:cNvPr id="15" name="Rounded Rectangle 14"/>
+          <p:cNvSpPr/>
+          <p:nvPr/>
+        </p:nvSpPr>
+        <p:spPr>
+          <a:xfrm>
+            <a:off x="7040880" y="4846320"/>
+            <a:ext cx="4617720" cy="1417320"/>
+          </a:xfrm>
+          <a:prstGeom prst="roundRect">
+            <a:avLst>
+              <a:gd name="adj" fmla="val 8000"/>
+            </a:avLst>
+          </a:prstGeom>
+          <a:solidFill>
+            <a:srgbClr val="FCF1DC"/>
+          </a:solidFill>
+          <a:ln>
+            <a:noFill/>
+          </a:ln>
+          <a:effectLst/>
+        </p:spPr>
+        <p:style>
+          <a:lnRef idx="1">
+            <a:schemeClr val="accent1"/>
+          </a:lnRef>
+          <a:fillRef idx="3">
+            <a:schemeClr val="accent1"/>
+          </a:fillRef>
+          <a:effectRef idx="2">
+            <a:schemeClr val="accent1"/>
+          </a:effectRef>
+          <a:fontRef idx="minor">
+            <a:schemeClr val="lt1"/>
+          </a:fontRef>
+        </p:style>
+        <p:txBody>
+          <a:bodyPr rtlCol="0" anchor="ctr"/>
+          <a:lstStyle/>
+          <a:p/>
+        </p:txBody>
+      </p:sp>
+      <p:sp>
+        <p:nvSpPr>
+          <p:cNvPr id="16" name="TextBox 15"/>
+          <p:cNvSpPr txBox="1"/>
+          <p:nvPr/>
+        </p:nvSpPr>
+        <p:spPr>
+          <a:xfrm>
+            <a:off x="7269480" y="5010912"/>
+            <a:ext cx="4160520" cy="1143000"/>
+          </a:xfrm>
+          <a:prstGeom prst="rect">
+            <a:avLst/>
+          </a:prstGeom>
+          <a:noFill/>
+        </p:spPr>
+        <p:txBody>
+          <a:bodyPr wrap="square" lIns="0" rIns="0" tIns="0" bIns="0" anchor="t">
+            <a:spAutoFit/>
+          </a:bodyPr>
+          <a:lstStyle/>
+          <a:p>
+            <a:pPr algn="l">
+              <a:spcAft>
+                <a:spcPts val="400"/>
+              </a:spcAft>
+            </a:pPr>
+            <a:r>
+              <a:rPr sz="1300" b="1" i="0">
+                <a:solidFill>
+                  <a:srgbClr val="875A00"/>
+                </a:solidFill>
+                <a:latin typeface="Calibri"/>
+              </a:rPr>
+              <a:t>!  Si sale en naranja o algo se queda quieto</a:t>
+            </a:r>
+          </a:p>
+          <a:p>
+            <a:pPr algn="l">
+              <a:spcAft>
+                <a:spcPts val="400"/>
+              </a:spcAft>
+            </a:pPr>
+            <a:r>
+              <a:rPr sz="1300" b="0" i="0">
+                <a:solidFill>
+                  <a:srgbClr val="0A0E1A"/>
+                </a:solidFill>
+                <a:latin typeface="Calibri"/>
+              </a:rPr>
+              <a:t>Naranja: es otra versión de Unity. Vuelve al paso 2.</a:t>
+            </a:r>
+          </a:p>
+          <a:p>
+            <a:pPr algn="l">
+              <a:spcAft>
+                <a:spcPts val="400"/>
+              </a:spcAft>
+            </a:pPr>
+            <a:r>
+              <a:rPr sz="1300" b="0" i="0">
+                <a:solidFill>
+                  <a:srgbClr val="0A0E1A"/>
+                </a:solidFill>
+                <a:latin typeface="Calibri"/>
+              </a:rPr>
+              <a:t>Si Windows pregunta por el Firewall, pulsa Cancelar: el kit no usa internet.</a:t>
+            </a:r>
+          </a:p>
+        </p:txBody>
+      </p:sp>
+      <p:sp>
+        <p:nvSpPr>
+          <p:cNvPr id="17" name="Rounded Rectangle 16"/>
+          <p:cNvSpPr/>
+          <p:nvPr/>
+        </p:nvSpPr>
+        <p:spPr>
+          <a:xfrm>
+            <a:off x="548640" y="4754880"/>
+            <a:ext cx="6035040" cy="1508760"/>
+          </a:xfrm>
+          <a:prstGeom prst="roundRect">
+            <a:avLst>
+              <a:gd name="adj" fmla="val 8000"/>
+            </a:avLst>
+          </a:prstGeom>
+          <a:solidFill>
+            <a:srgbClr val="E3F4EA"/>
+          </a:solidFill>
+          <a:ln>
+            <a:noFill/>
+          </a:ln>
+          <a:effectLst/>
+        </p:spPr>
+        <p:style>
+          <a:lnRef idx="1">
+            <a:schemeClr val="accent1"/>
+          </a:lnRef>
+          <a:fillRef idx="3">
+            <a:schemeClr val="accent1"/>
+          </a:fillRef>
+          <a:effectRef idx="2">
+            <a:schemeClr val="accent1"/>
+          </a:effectRef>
+          <a:fontRef idx="minor">
+            <a:schemeClr val="lt1"/>
+          </a:fontRef>
+        </p:style>
+        <p:txBody>
+          <a:bodyPr rtlCol="0" anchor="ctr"/>
+          <a:lstStyle/>
+          <a:p/>
+        </p:txBody>
+      </p:sp>
+      <p:sp>
+        <p:nvSpPr>
+          <p:cNvPr id="18" name="TextBox 17"/>
+          <p:cNvSpPr txBox="1"/>
+          <p:nvPr/>
+        </p:nvSpPr>
+        <p:spPr>
+          <a:xfrm>
+            <a:off x="777240" y="4919472"/>
+            <a:ext cx="5577840" cy="1234439"/>
+          </a:xfrm>
+          <a:prstGeom prst="rect">
+            <a:avLst/>
+          </a:prstGeom>
+          <a:noFill/>
+        </p:spPr>
+        <p:txBody>
+          <a:bodyPr wrap="square" lIns="0" rIns="0" tIns="0" bIns="0" anchor="t">
+            <a:spAutoFit/>
+          </a:bodyPr>
+          <a:lstStyle/>
+          <a:p>
+            <a:pPr algn="l">
+              <a:spcAft>
+                <a:spcPts val="400"/>
+              </a:spcAft>
+            </a:pPr>
+            <a:r>
+              <a:rPr sz="1300" b="1" i="0">
+                <a:solidFill>
+                  <a:srgbClr val="097A41"/>
+                </a:solidFill>
+                <a:latin typeface="Calibri"/>
+              </a:rPr>
+              <a:t>✓  Con el letrero verde, la Fase 0 está completa</a:t>
+            </a:r>
+          </a:p>
+          <a:p>
+            <a:pPr algn="l">
+              <a:spcAft>
+                <a:spcPts val="400"/>
+              </a:spcAft>
+            </a:pPr>
+            <a:r>
+              <a:rPr sz="1300" b="0" i="0">
+                <a:solidFill>
+                  <a:srgbClr val="0A0E1A"/>
+                </a:solidFill>
+                <a:latin typeface="Calibri"/>
+              </a:rPr>
+              <a:t>Significa tres cosas a la vez: la versión es la correcta, el kit se importó completo y no hay ningún error de compilación.</a:t>
+            </a:r>
+          </a:p>
+          <a:p>
+            <a:pPr algn="l">
+              <a:spcAft>
+                <a:spcPts val="400"/>
+              </a:spcAft>
+            </a:pPr>
+            <a:r>
+              <a:rPr sz="1300" b="0" i="0">
+                <a:solidFill>
+                  <a:srgbClr val="0A0E1A"/>
+                </a:solidFill>
+                <a:latin typeface="Calibri"/>
+              </a:rPr>
+              <a:t>Haz una captura de esa pantalla y súbela a la carpeta del equipo como Fase0_listo.png.</a:t>
+            </a:r>
+          </a:p>
+        </p:txBody>
+      </p:sp>
+      <p:sp>
+        <p:nvSpPr>
+          <p:cNvPr id="19" name="Pie"/>
+          <p:cNvSpPr txBox="1"/>
+          <p:nvPr/>
+        </p:nvSpPr>
+        <p:spPr>
+          <a:xfrm>
+            <a:off x="548640" y="6400800"/>
+            <a:ext cx="11064240" cy="274320"/>
+          </a:xfrm>
+          <a:prstGeom prst="rect">
+            <a:avLst/>
+          </a:prstGeom>
+          <a:noFill/>
+        </p:spPr>
+        <p:txBody>
+          <a:bodyPr wrap="square" lIns="0" rIns="0" tIns="0" bIns="0" anchor="t">
+            <a:spAutoFit/>
+          </a:bodyPr>
+          <a:lstStyle/>
+          <a:p>
             <a:pPr algn="r">
               <a:spcAft>
                 <a:spcPts val="600"/>
@@ -13003,11 +15726,11 @@
             <a:r>
               <a:rPr sz="1100" b="0" i="0">
                 <a:solidFill>
-                  <a:srgbClr val="94A4C6"/>
-                </a:solidFill>
-                <a:latin typeface="Calibri"/>
-              </a:rPr>
-              <a:t>Guía 0 · Preparar Unity  ·  9 de 9</a:t>
+                  <a:srgbClr val="4F5C75"/>
+                </a:solidFill>
+                <a:latin typeface="Calibri"/>
+              </a:rPr>
+              <a:t>Guía 0 · Preparar Unity  ·  9 de 11</a:t>
             </a:r>
           </a:p>
         </p:txBody>

--- a/docs/descargas/unity/Guia0_Preparar_Unity.pptx
+++ b/docs/descargas/unity/Guia0_Preparar_Unity.pptx
@@ -9145,7 +9145,7 @@
         <p:spPr>
           <a:xfrm>
             <a:off x="7086600" y="2834640"/>
-            <a:ext cx="4572000" cy="2148840"/>
+            <a:ext cx="4572000" cy="2514600"/>
           </a:xfrm>
           <a:prstGeom prst="roundRect">
             <a:avLst>
@@ -9189,7 +9189,7 @@
         <p:spPr>
           <a:xfrm>
             <a:off x="7315200" y="2999232"/>
-            <a:ext cx="4114800" cy="1874520"/>
+            <a:ext cx="4114800" cy="2240280"/>
           </a:xfrm>
           <a:prstGeom prst="rect">
             <a:avLst/>
@@ -9208,7 +9208,7 @@
               </a:spcAft>
             </a:pPr>
             <a:r>
-              <a:rPr sz="1400" b="1" i="0">
+              <a:rPr sz="1300" b="1" i="0">
                 <a:solidFill>
                   <a:srgbClr val="B3261E"/>
                 </a:solidFill>
@@ -9240,7 +9240,7 @@
               </a:spcAft>
             </a:pPr>
             <a:r>
-              <a:rPr sz="1400" b="0" i="0">
+              <a:rPr sz="1300" b="0" i="0">
                 <a:solidFill>
                   <a:srgbClr val="0A0E1A"/>
                 </a:solidFill>
@@ -9256,13 +9256,29 @@
               </a:spcAft>
             </a:pPr>
             <a:r>
-              <a:rPr sz="1400" b="0" i="0">
+              <a:rPr sz="1300" b="0" i="0">
                 <a:solidFill>
                   <a:srgbClr val="0A0E1A"/>
                 </a:solidFill>
                 <a:latin typeface="Calibri"/>
               </a:rPr>
               <a:t>Tampoco en el Escritorio ni en Documentos: en muchos computadores también están dentro de OneDrive.</a:t>
+            </a:r>
+          </a:p>
+          <a:p>
+            <a:pPr algn="l">
+              <a:spcAft>
+                <a:spcPts val="400"/>
+              </a:spcAft>
+            </a:pPr>
+            <a:r>
+              <a:rPr sz="1300" b="0" i="0">
+                <a:solidFill>
+                  <a:srgbClr val="0A0E1A"/>
+                </a:solidFill>
+                <a:latin typeface="Calibri"/>
+              </a:rPr>
+              <a:t>Ni en una carpeta con tildes, como Educación: Unity Hub no puede crear el proyecto ahí.</a:t>
             </a:r>
           </a:p>
         </p:txBody>
